--- a/Présentation - Mini Projet Fondements Des Réseaux.pptx
+++ b/Présentation - Mini Projet Fondements Des Réseaux.pptx
@@ -1,36 +1,40 @@
 
 <file path=ppt/presentation.xml><?xml version="1.0" encoding="utf-8"?>
-<p:presentation xmlns:a="http://schemas.openxmlformats.org/drawingml/2006/main" xmlns:r="http://schemas.openxmlformats.org/officeDocument/2006/relationships" xmlns:p="http://schemas.openxmlformats.org/presentationml/2006/main" saveSubsetFonts="1" embedTrueTypeFonts="true">
+<p:presentation xmlns:a="http://schemas.openxmlformats.org/drawingml/2006/main" xmlns:r="http://schemas.openxmlformats.org/officeDocument/2006/relationships" xmlns:p="http://schemas.openxmlformats.org/presentationml/2006/main" embedTrueTypeFonts="1" saveSubsetFonts="1">
   <p:sldMasterIdLst>
     <p:sldMasterId id="2147483648" r:id="rId1"/>
   </p:sldMasterIdLst>
   <p:sldIdLst>
-    <p:sldId id="256" r:id="rId6"/>
-    <p:sldId id="257" r:id="rId7"/>
-    <p:sldId id="258" r:id="rId8"/>
-    <p:sldId id="259" r:id="rId9"/>
-    <p:sldId id="260" r:id="rId10"/>
-    <p:sldId id="261" r:id="rId11"/>
-    <p:sldId id="262" r:id="rId12"/>
+    <p:sldId id="256" r:id="rId2"/>
+    <p:sldId id="257" r:id="rId3"/>
+    <p:sldId id="258" r:id="rId4"/>
+    <p:sldId id="261" r:id="rId5"/>
   </p:sldIdLst>
   <p:sldSz cx="18288000" cy="10287000"/>
   <p:notesSz cx="6858000" cy="9144000"/>
   <p:embeddedFontLst>
     <p:embeddedFont>
-      <p:font typeface="Tenor Sans" charset="1" panose="02000000000000000000"/>
-      <p:regular r:id="rId13"/>
+      <p:font typeface="Clear Sans" panose="020B0604020202020204" charset="0"/>
+      <p:regular r:id="rId6"/>
     </p:embeddedFont>
     <p:embeddedFont>
-      <p:font typeface="Clear Sans" charset="1" panose="020B0503030202020304"/>
-      <p:regular r:id="rId14"/>
+      <p:font typeface="Clear Sans Bold" panose="020B0604020202020204" charset="0"/>
+      <p:regular r:id="rId7"/>
     </p:embeddedFont>
     <p:embeddedFont>
-      <p:font typeface="Clear Sans Medium" charset="1" panose="020B0603030202020304"/>
-      <p:regular r:id="rId15"/>
+      <p:font typeface="Clear Sans Medium" panose="020B0604020202020204" charset="0"/>
+      <p:regular r:id="rId8"/>
     </p:embeddedFont>
     <p:embeddedFont>
-      <p:font typeface="Clear Sans Bold" charset="1" panose="020B0803030202020304"/>
-      <p:regular r:id="rId16"/>
+      <p:font typeface="Sitka Heading" panose="02000505000000020004" pitchFamily="2" charset="0"/>
+      <p:regular r:id="rId9"/>
+      <p:bold r:id="rId10"/>
+      <p:italic r:id="rId11"/>
+      <p:boldItalic r:id="rId12"/>
+    </p:embeddedFont>
+    <p:embeddedFont>
+      <p:font typeface="Tenor Sans" panose="020B0604020202020204" charset="0"/>
+      <p:regular r:id="rId13"/>
     </p:embeddedFont>
   </p:embeddedFontLst>
   <p:defaultTextStyle>
@@ -128,6 +132,22 @@
       </a:defRPr>
     </a:lvl9pPr>
   </p:defaultTextStyle>
+  <p:extLst>
+    <p:ext uri="{EFAFB233-063F-42B5-8137-9DF3F51BA10A}">
+      <p15:sldGuideLst xmlns:p15="http://schemas.microsoft.com/office/powerpoint/2012/main">
+        <p15:guide id="1" orient="horz" pos="2160">
+          <p15:clr>
+            <a:srgbClr val="A4A3A4"/>
+          </p15:clr>
+        </p15:guide>
+        <p15:guide id="2" pos="2880">
+          <p15:clr>
+            <a:srgbClr val="A4A3A4"/>
+          </p15:clr>
+        </p15:guide>
+      </p15:sldGuideLst>
+    </p:ext>
+  </p:extLst>
 </p:presentation>
 </file>
 
@@ -169,10 +189,9 @@
           <a:lstStyle/>
           <a:p>
             <a:r>
-              <a:rPr lang="en-US" smtClean="0"/>
+              <a:rPr lang="en-US"/>
               <a:t>Click to edit Master title style</a:t>
             </a:r>
-            <a:endParaRPr lang="en-US"/>
           </a:p>
         </p:txBody>
       </p:sp>
@@ -288,10 +307,9 @@
           </a:lstStyle>
           <a:p>
             <a:r>
-              <a:rPr lang="en-US" smtClean="0"/>
+              <a:rPr lang="en-US"/>
               <a:t>Click to edit Master subtitle style</a:t>
             </a:r>
-            <a:endParaRPr lang="en-US"/>
           </a:p>
         </p:txBody>
       </p:sp>
@@ -313,7 +331,7 @@
             <a:fld id="{1D8BD707-D9CF-40AE-B4C6-C98DA3205C09}" type="datetimeFigureOut">
               <a:rPr lang="en-US" smtClean="0"/>
               <a:pPr/>
-              <a:t>8/1/2011</a:t>
+              <a:t>4/27/2026</a:t>
             </a:fld>
             <a:endParaRPr lang="en-US"/>
           </a:p>
@@ -403,10 +421,9 @@
           <a:lstStyle/>
           <a:p>
             <a:r>
-              <a:rPr lang="en-US" smtClean="0"/>
+              <a:rPr lang="en-US"/>
               <a:t>Click to edit Master title style</a:t>
             </a:r>
-            <a:endParaRPr lang="en-US"/>
           </a:p>
         </p:txBody>
       </p:sp>
@@ -427,38 +444,37 @@
           <a:p>
             <a:pPr lvl="0"/>
             <a:r>
-              <a:rPr lang="en-US" smtClean="0"/>
+              <a:rPr lang="en-US"/>
               <a:t>Click to edit Master text styles</a:t>
             </a:r>
           </a:p>
           <a:p>
             <a:pPr lvl="1"/>
             <a:r>
-              <a:rPr lang="en-US" smtClean="0"/>
+              <a:rPr lang="en-US"/>
               <a:t>Second level</a:t>
             </a:r>
           </a:p>
           <a:p>
             <a:pPr lvl="2"/>
             <a:r>
-              <a:rPr lang="en-US" smtClean="0"/>
+              <a:rPr lang="en-US"/>
               <a:t>Third level</a:t>
             </a:r>
           </a:p>
           <a:p>
             <a:pPr lvl="3"/>
             <a:r>
-              <a:rPr lang="en-US" smtClean="0"/>
+              <a:rPr lang="en-US"/>
               <a:t>Fourth level</a:t>
             </a:r>
           </a:p>
           <a:p>
             <a:pPr lvl="4"/>
             <a:r>
-              <a:rPr lang="en-US" smtClean="0"/>
+              <a:rPr lang="en-US"/>
               <a:t>Fifth level</a:t>
             </a:r>
-            <a:endParaRPr lang="en-US"/>
           </a:p>
         </p:txBody>
       </p:sp>
@@ -480,7 +496,7 @@
             <a:fld id="{1D8BD707-D9CF-40AE-B4C6-C98DA3205C09}" type="datetimeFigureOut">
               <a:rPr lang="en-US" smtClean="0"/>
               <a:pPr/>
-              <a:t>8/1/2011</a:t>
+              <a:t>4/27/2026</a:t>
             </a:fld>
             <a:endParaRPr lang="en-US"/>
           </a:p>
@@ -575,10 +591,9 @@
           <a:lstStyle/>
           <a:p>
             <a:r>
-              <a:rPr lang="en-US" smtClean="0"/>
+              <a:rPr lang="en-US"/>
               <a:t>Click to edit Master title style</a:t>
             </a:r>
-            <a:endParaRPr lang="en-US"/>
           </a:p>
         </p:txBody>
       </p:sp>
@@ -604,38 +619,37 @@
           <a:p>
             <a:pPr lvl="0"/>
             <a:r>
-              <a:rPr lang="en-US" smtClean="0"/>
+              <a:rPr lang="en-US"/>
               <a:t>Click to edit Master text styles</a:t>
             </a:r>
           </a:p>
           <a:p>
             <a:pPr lvl="1"/>
             <a:r>
-              <a:rPr lang="en-US" smtClean="0"/>
+              <a:rPr lang="en-US"/>
               <a:t>Second level</a:t>
             </a:r>
           </a:p>
           <a:p>
             <a:pPr lvl="2"/>
             <a:r>
-              <a:rPr lang="en-US" smtClean="0"/>
+              <a:rPr lang="en-US"/>
               <a:t>Third level</a:t>
             </a:r>
           </a:p>
           <a:p>
             <a:pPr lvl="3"/>
             <a:r>
-              <a:rPr lang="en-US" smtClean="0"/>
+              <a:rPr lang="en-US"/>
               <a:t>Fourth level</a:t>
             </a:r>
           </a:p>
           <a:p>
             <a:pPr lvl="4"/>
             <a:r>
-              <a:rPr lang="en-US" smtClean="0"/>
+              <a:rPr lang="en-US"/>
               <a:t>Fifth level</a:t>
             </a:r>
-            <a:endParaRPr lang="en-US"/>
           </a:p>
         </p:txBody>
       </p:sp>
@@ -657,7 +671,7 @@
             <a:fld id="{1D8BD707-D9CF-40AE-B4C6-C98DA3205C09}" type="datetimeFigureOut">
               <a:rPr lang="en-US" smtClean="0"/>
               <a:pPr/>
-              <a:t>8/1/2011</a:t>
+              <a:t>4/27/2026</a:t>
             </a:fld>
             <a:endParaRPr lang="en-US"/>
           </a:p>
@@ -747,10 +761,9 @@
           <a:lstStyle/>
           <a:p>
             <a:r>
-              <a:rPr lang="en-US" smtClean="0"/>
+              <a:rPr lang="en-US"/>
               <a:t>Click to edit Master title style</a:t>
             </a:r>
-            <a:endParaRPr lang="en-US"/>
           </a:p>
         </p:txBody>
       </p:sp>
@@ -771,38 +784,37 @@
           <a:p>
             <a:pPr lvl="0"/>
             <a:r>
-              <a:rPr lang="en-US" smtClean="0"/>
+              <a:rPr lang="en-US"/>
               <a:t>Click to edit Master text styles</a:t>
             </a:r>
           </a:p>
           <a:p>
             <a:pPr lvl="1"/>
             <a:r>
-              <a:rPr lang="en-US" smtClean="0"/>
+              <a:rPr lang="en-US"/>
               <a:t>Second level</a:t>
             </a:r>
           </a:p>
           <a:p>
             <a:pPr lvl="2"/>
             <a:r>
-              <a:rPr lang="en-US" smtClean="0"/>
+              <a:rPr lang="en-US"/>
               <a:t>Third level</a:t>
             </a:r>
           </a:p>
           <a:p>
             <a:pPr lvl="3"/>
             <a:r>
-              <a:rPr lang="en-US" smtClean="0"/>
+              <a:rPr lang="en-US"/>
               <a:t>Fourth level</a:t>
             </a:r>
           </a:p>
           <a:p>
             <a:pPr lvl="4"/>
             <a:r>
-              <a:rPr lang="en-US" smtClean="0"/>
+              <a:rPr lang="en-US"/>
               <a:t>Fifth level</a:t>
             </a:r>
-            <a:endParaRPr lang="en-US"/>
           </a:p>
         </p:txBody>
       </p:sp>
@@ -824,7 +836,7 @@
             <a:fld id="{1D8BD707-D9CF-40AE-B4C6-C98DA3205C09}" type="datetimeFigureOut">
               <a:rPr lang="en-US" smtClean="0"/>
               <a:pPr/>
-              <a:t>8/1/2011</a:t>
+              <a:t>4/27/2026</a:t>
             </a:fld>
             <a:endParaRPr lang="en-US"/>
           </a:p>
@@ -923,10 +935,9 @@
           </a:lstStyle>
           <a:p>
             <a:r>
-              <a:rPr lang="en-US" smtClean="0"/>
+              <a:rPr lang="en-US"/>
               <a:t>Click to edit Master title style</a:t>
             </a:r>
-            <a:endParaRPr lang="en-US"/>
           </a:p>
         </p:txBody>
       </p:sp>
@@ -1043,7 +1054,7 @@
           <a:p>
             <a:pPr lvl="0"/>
             <a:r>
-              <a:rPr lang="en-US" smtClean="0"/>
+              <a:rPr lang="en-US"/>
               <a:t>Click to edit Master text styles</a:t>
             </a:r>
           </a:p>
@@ -1067,7 +1078,7 @@
             <a:fld id="{1D8BD707-D9CF-40AE-B4C6-C98DA3205C09}" type="datetimeFigureOut">
               <a:rPr lang="en-US" smtClean="0"/>
               <a:pPr/>
-              <a:t>8/1/2011</a:t>
+              <a:t>4/27/2026</a:t>
             </a:fld>
             <a:endParaRPr lang="en-US"/>
           </a:p>
@@ -1157,10 +1168,9 @@
           <a:lstStyle/>
           <a:p>
             <a:r>
-              <a:rPr lang="en-US" smtClean="0"/>
+              <a:rPr lang="en-US"/>
               <a:t>Click to edit Master title style</a:t>
             </a:r>
-            <a:endParaRPr lang="en-US"/>
           </a:p>
         </p:txBody>
       </p:sp>
@@ -1214,38 +1224,37 @@
           <a:p>
             <a:pPr lvl="0"/>
             <a:r>
-              <a:rPr lang="en-US" smtClean="0"/>
+              <a:rPr lang="en-US"/>
               <a:t>Click to edit Master text styles</a:t>
             </a:r>
           </a:p>
           <a:p>
             <a:pPr lvl="1"/>
             <a:r>
-              <a:rPr lang="en-US" smtClean="0"/>
+              <a:rPr lang="en-US"/>
               <a:t>Second level</a:t>
             </a:r>
           </a:p>
           <a:p>
             <a:pPr lvl="2"/>
             <a:r>
-              <a:rPr lang="en-US" smtClean="0"/>
+              <a:rPr lang="en-US"/>
               <a:t>Third level</a:t>
             </a:r>
           </a:p>
           <a:p>
             <a:pPr lvl="3"/>
             <a:r>
-              <a:rPr lang="en-US" smtClean="0"/>
+              <a:rPr lang="en-US"/>
               <a:t>Fourth level</a:t>
             </a:r>
           </a:p>
           <a:p>
             <a:pPr lvl="4"/>
             <a:r>
-              <a:rPr lang="en-US" smtClean="0"/>
+              <a:rPr lang="en-US"/>
               <a:t>Fifth level</a:t>
             </a:r>
-            <a:endParaRPr lang="en-US"/>
           </a:p>
         </p:txBody>
       </p:sp>
@@ -1299,38 +1308,37 @@
           <a:p>
             <a:pPr lvl="0"/>
             <a:r>
-              <a:rPr lang="en-US" smtClean="0"/>
+              <a:rPr lang="en-US"/>
               <a:t>Click to edit Master text styles</a:t>
             </a:r>
           </a:p>
           <a:p>
             <a:pPr lvl="1"/>
             <a:r>
-              <a:rPr lang="en-US" smtClean="0"/>
+              <a:rPr lang="en-US"/>
               <a:t>Second level</a:t>
             </a:r>
           </a:p>
           <a:p>
             <a:pPr lvl="2"/>
             <a:r>
-              <a:rPr lang="en-US" smtClean="0"/>
+              <a:rPr lang="en-US"/>
               <a:t>Third level</a:t>
             </a:r>
           </a:p>
           <a:p>
             <a:pPr lvl="3"/>
             <a:r>
-              <a:rPr lang="en-US" smtClean="0"/>
+              <a:rPr lang="en-US"/>
               <a:t>Fourth level</a:t>
             </a:r>
           </a:p>
           <a:p>
             <a:pPr lvl="4"/>
             <a:r>
-              <a:rPr lang="en-US" smtClean="0"/>
+              <a:rPr lang="en-US"/>
               <a:t>Fifth level</a:t>
             </a:r>
-            <a:endParaRPr lang="en-US"/>
           </a:p>
         </p:txBody>
       </p:sp>
@@ -1352,7 +1360,7 @@
             <a:fld id="{1D8BD707-D9CF-40AE-B4C6-C98DA3205C09}" type="datetimeFigureOut">
               <a:rPr lang="en-US" smtClean="0"/>
               <a:pPr/>
-              <a:t>8/1/2011</a:t>
+              <a:t>4/27/2026</a:t>
             </a:fld>
             <a:endParaRPr lang="en-US"/>
           </a:p>
@@ -1446,10 +1454,9 @@
           </a:lstStyle>
           <a:p>
             <a:r>
-              <a:rPr lang="en-US" smtClean="0"/>
+              <a:rPr lang="en-US"/>
               <a:t>Click to edit Master title style</a:t>
             </a:r>
-            <a:endParaRPr lang="en-US"/>
           </a:p>
         </p:txBody>
       </p:sp>
@@ -1512,7 +1519,7 @@
           <a:p>
             <a:pPr lvl="0"/>
             <a:r>
-              <a:rPr lang="en-US" smtClean="0"/>
+              <a:rPr lang="en-US"/>
               <a:t>Click to edit Master text styles</a:t>
             </a:r>
           </a:p>
@@ -1568,38 +1575,37 @@
           <a:p>
             <a:pPr lvl="0"/>
             <a:r>
-              <a:rPr lang="en-US" smtClean="0"/>
+              <a:rPr lang="en-US"/>
               <a:t>Click to edit Master text styles</a:t>
             </a:r>
           </a:p>
           <a:p>
             <a:pPr lvl="1"/>
             <a:r>
-              <a:rPr lang="en-US" smtClean="0"/>
+              <a:rPr lang="en-US"/>
               <a:t>Second level</a:t>
             </a:r>
           </a:p>
           <a:p>
             <a:pPr lvl="2"/>
             <a:r>
-              <a:rPr lang="en-US" smtClean="0"/>
+              <a:rPr lang="en-US"/>
               <a:t>Third level</a:t>
             </a:r>
           </a:p>
           <a:p>
             <a:pPr lvl="3"/>
             <a:r>
-              <a:rPr lang="en-US" smtClean="0"/>
+              <a:rPr lang="en-US"/>
               <a:t>Fourth level</a:t>
             </a:r>
           </a:p>
           <a:p>
             <a:pPr lvl="4"/>
             <a:r>
-              <a:rPr lang="en-US" smtClean="0"/>
+              <a:rPr lang="en-US"/>
               <a:t>Fifth level</a:t>
             </a:r>
-            <a:endParaRPr lang="en-US"/>
           </a:p>
         </p:txBody>
       </p:sp>
@@ -1662,7 +1668,7 @@
           <a:p>
             <a:pPr lvl="0"/>
             <a:r>
-              <a:rPr lang="en-US" smtClean="0"/>
+              <a:rPr lang="en-US"/>
               <a:t>Click to edit Master text styles</a:t>
             </a:r>
           </a:p>
@@ -1718,38 +1724,37 @@
           <a:p>
             <a:pPr lvl="0"/>
             <a:r>
-              <a:rPr lang="en-US" smtClean="0"/>
+              <a:rPr lang="en-US"/>
               <a:t>Click to edit Master text styles</a:t>
             </a:r>
           </a:p>
           <a:p>
             <a:pPr lvl="1"/>
             <a:r>
-              <a:rPr lang="en-US" smtClean="0"/>
+              <a:rPr lang="en-US"/>
               <a:t>Second level</a:t>
             </a:r>
           </a:p>
           <a:p>
             <a:pPr lvl="2"/>
             <a:r>
-              <a:rPr lang="en-US" smtClean="0"/>
+              <a:rPr lang="en-US"/>
               <a:t>Third level</a:t>
             </a:r>
           </a:p>
           <a:p>
             <a:pPr lvl="3"/>
             <a:r>
-              <a:rPr lang="en-US" smtClean="0"/>
+              <a:rPr lang="en-US"/>
               <a:t>Fourth level</a:t>
             </a:r>
           </a:p>
           <a:p>
             <a:pPr lvl="4"/>
             <a:r>
-              <a:rPr lang="en-US" smtClean="0"/>
+              <a:rPr lang="en-US"/>
               <a:t>Fifth level</a:t>
             </a:r>
-            <a:endParaRPr lang="en-US"/>
           </a:p>
         </p:txBody>
       </p:sp>
@@ -1771,7 +1776,7 @@
             <a:fld id="{1D8BD707-D9CF-40AE-B4C6-C98DA3205C09}" type="datetimeFigureOut">
               <a:rPr lang="en-US" smtClean="0"/>
               <a:pPr/>
-              <a:t>8/1/2011</a:t>
+              <a:t>4/27/2026</a:t>
             </a:fld>
             <a:endParaRPr lang="en-US"/>
           </a:p>
@@ -1861,10 +1866,9 @@
           <a:lstStyle/>
           <a:p>
             <a:r>
-              <a:rPr lang="en-US" smtClean="0"/>
+              <a:rPr lang="en-US"/>
               <a:t>Click to edit Master title style</a:t>
             </a:r>
-            <a:endParaRPr lang="en-US"/>
           </a:p>
         </p:txBody>
       </p:sp>
@@ -1886,7 +1890,7 @@
             <a:fld id="{1D8BD707-D9CF-40AE-B4C6-C98DA3205C09}" type="datetimeFigureOut">
               <a:rPr lang="en-US" smtClean="0"/>
               <a:pPr/>
-              <a:t>8/1/2011</a:t>
+              <a:t>4/27/2026</a:t>
             </a:fld>
             <a:endParaRPr lang="en-US"/>
           </a:p>
@@ -1978,7 +1982,7 @@
             <a:fld id="{1D8BD707-D9CF-40AE-B4C6-C98DA3205C09}" type="datetimeFigureOut">
               <a:rPr lang="en-US" smtClean="0"/>
               <a:pPr/>
-              <a:t>8/1/2011</a:t>
+              <a:t>4/27/2026</a:t>
             </a:fld>
             <a:endParaRPr lang="en-US"/>
           </a:p>
@@ -2077,10 +2081,9 @@
           </a:lstStyle>
           <a:p>
             <a:r>
-              <a:rPr lang="en-US" smtClean="0"/>
+              <a:rPr lang="en-US"/>
               <a:t>Click to edit Master title style</a:t>
             </a:r>
-            <a:endParaRPr lang="en-US"/>
           </a:p>
         </p:txBody>
       </p:sp>
@@ -2134,38 +2137,37 @@
           <a:p>
             <a:pPr lvl="0"/>
             <a:r>
-              <a:rPr lang="en-US" smtClean="0"/>
+              <a:rPr lang="en-US"/>
               <a:t>Click to edit Master text styles</a:t>
             </a:r>
           </a:p>
           <a:p>
             <a:pPr lvl="1"/>
             <a:r>
-              <a:rPr lang="en-US" smtClean="0"/>
+              <a:rPr lang="en-US"/>
               <a:t>Second level</a:t>
             </a:r>
           </a:p>
           <a:p>
             <a:pPr lvl="2"/>
             <a:r>
-              <a:rPr lang="en-US" smtClean="0"/>
+              <a:rPr lang="en-US"/>
               <a:t>Third level</a:t>
             </a:r>
           </a:p>
           <a:p>
             <a:pPr lvl="3"/>
             <a:r>
-              <a:rPr lang="en-US" smtClean="0"/>
+              <a:rPr lang="en-US"/>
               <a:t>Fourth level</a:t>
             </a:r>
           </a:p>
           <a:p>
             <a:pPr lvl="4"/>
             <a:r>
-              <a:rPr lang="en-US" smtClean="0"/>
+              <a:rPr lang="en-US"/>
               <a:t>Fifth level</a:t>
             </a:r>
-            <a:endParaRPr lang="en-US"/>
           </a:p>
         </p:txBody>
       </p:sp>
@@ -2228,7 +2230,7 @@
           <a:p>
             <a:pPr lvl="0"/>
             <a:r>
-              <a:rPr lang="en-US" smtClean="0"/>
+              <a:rPr lang="en-US"/>
               <a:t>Click to edit Master text styles</a:t>
             </a:r>
           </a:p>
@@ -2252,7 +2254,7 @@
             <a:fld id="{1D8BD707-D9CF-40AE-B4C6-C98DA3205C09}" type="datetimeFigureOut">
               <a:rPr lang="en-US" smtClean="0"/>
               <a:pPr/>
-              <a:t>8/1/2011</a:t>
+              <a:t>4/27/2026</a:t>
             </a:fld>
             <a:endParaRPr lang="en-US"/>
           </a:p>
@@ -2351,10 +2353,9 @@
           </a:lstStyle>
           <a:p>
             <a:r>
-              <a:rPr lang="en-US" smtClean="0"/>
+              <a:rPr lang="en-US"/>
               <a:t>Click to edit Master title style</a:t>
             </a:r>
-            <a:endParaRPr lang="en-US"/>
           </a:p>
         </p:txBody>
       </p:sp>
@@ -2478,7 +2479,7 @@
           <a:p>
             <a:pPr lvl="0"/>
             <a:r>
-              <a:rPr lang="en-US" smtClean="0"/>
+              <a:rPr lang="en-US"/>
               <a:t>Click to edit Master text styles</a:t>
             </a:r>
           </a:p>
@@ -2502,7 +2503,7 @@
             <a:fld id="{1D8BD707-D9CF-40AE-B4C6-C98DA3205C09}" type="datetimeFigureOut">
               <a:rPr lang="en-US" smtClean="0"/>
               <a:pPr/>
-              <a:t>8/1/2011</a:t>
+              <a:t>4/27/2026</a:t>
             </a:fld>
             <a:endParaRPr lang="en-US"/>
           </a:p>
@@ -2607,10 +2608,9 @@
           <a:lstStyle/>
           <a:p>
             <a:r>
-              <a:rPr lang="en-US" smtClean="0"/>
+              <a:rPr lang="en-US"/>
               <a:t>Click to edit Master title style</a:t>
             </a:r>
-            <a:endParaRPr lang="en-US"/>
           </a:p>
         </p:txBody>
       </p:sp>
@@ -2641,38 +2641,37 @@
           <a:p>
             <a:pPr lvl="0"/>
             <a:r>
-              <a:rPr lang="en-US" smtClean="0"/>
+              <a:rPr lang="en-US"/>
               <a:t>Click to edit Master text styles</a:t>
             </a:r>
           </a:p>
           <a:p>
             <a:pPr lvl="1"/>
             <a:r>
-              <a:rPr lang="en-US" smtClean="0"/>
+              <a:rPr lang="en-US"/>
               <a:t>Second level</a:t>
             </a:r>
           </a:p>
           <a:p>
             <a:pPr lvl="2"/>
             <a:r>
-              <a:rPr lang="en-US" smtClean="0"/>
+              <a:rPr lang="en-US"/>
               <a:t>Third level</a:t>
             </a:r>
           </a:p>
           <a:p>
             <a:pPr lvl="3"/>
             <a:r>
-              <a:rPr lang="en-US" smtClean="0"/>
+              <a:rPr lang="en-US"/>
               <a:t>Fourth level</a:t>
             </a:r>
           </a:p>
           <a:p>
             <a:pPr lvl="4"/>
             <a:r>
-              <a:rPr lang="en-US" smtClean="0"/>
+              <a:rPr lang="en-US"/>
               <a:t>Fifth level</a:t>
             </a:r>
-            <a:endParaRPr lang="en-US"/>
           </a:p>
         </p:txBody>
       </p:sp>
@@ -2712,7 +2711,7 @@
             <a:fld id="{1D8BD707-D9CF-40AE-B4C6-C98DA3205C09}" type="datetimeFigureOut">
               <a:rPr lang="en-US" smtClean="0"/>
               <a:pPr/>
-              <a:t>8/1/2011</a:t>
+              <a:t>4/27/2026</a:t>
             </a:fld>
             <a:endParaRPr lang="en-US"/>
           </a:p>
@@ -3067,13 +3066,14 @@
 </file>
 
 <file path=ppt/slides/slide1.xml><?xml version="1.0" encoding="utf-8"?>
-<p:sld xmlns:p="http://schemas.openxmlformats.org/presentationml/2006/main" xmlns:a="http://schemas.openxmlformats.org/drawingml/2006/main" xmlns:r="http://schemas.openxmlformats.org/officeDocument/2006/relationships">
+<p:sld xmlns:a="http://schemas.openxmlformats.org/drawingml/2006/main" xmlns:r="http://schemas.openxmlformats.org/officeDocument/2006/relationships" xmlns:p="http://schemas.openxmlformats.org/presentationml/2006/main">
   <p:cSld>
     <p:bg>
       <p:bgPr>
         <a:solidFill>
           <a:srgbClr val="1F2937"/>
         </a:solidFill>
+        <a:effectLst/>
       </p:bgPr>
     </p:bg>
     <p:spTree>
@@ -3092,40 +3092,40 @@
       </p:grpSpPr>
       <p:grpSp>
         <p:nvGrpSpPr>
-          <p:cNvPr name="Group 2" id="2"/>
+          <p:cNvPr id="2" name="Group 2"/>
           <p:cNvGrpSpPr/>
           <p:nvPr/>
         </p:nvGrpSpPr>
         <p:grpSpPr>
-          <a:xfrm rot="0">
-            <a:off x="490242" y="1627299"/>
-            <a:ext cx="5490557" cy="8158680"/>
-            <a:chOff x="0" y="0"/>
-            <a:chExt cx="7320742" cy="10878240"/>
+          <a:xfrm>
+            <a:off x="490242" y="4381500"/>
+            <a:ext cx="8348958" cy="5087797"/>
+            <a:chOff x="0" y="3672268"/>
+            <a:chExt cx="11131943" cy="6783730"/>
           </a:xfrm>
         </p:grpSpPr>
         <p:sp>
           <p:nvSpPr>
-            <p:cNvPr name="TextBox 3" id="3"/>
-            <p:cNvSpPr txBox="true"/>
+            <p:cNvPr id="3" name="TextBox 3"/>
+            <p:cNvSpPr txBox="1"/>
             <p:nvPr/>
           </p:nvSpPr>
           <p:spPr>
-            <a:xfrm rot="0">
-              <a:off x="0" y="38100"/>
-              <a:ext cx="7320742" cy="3828204"/>
+            <a:xfrm>
+              <a:off x="768744" y="3672268"/>
+              <a:ext cx="10363199" cy="742084"/>
             </a:xfrm>
             <a:prstGeom prst="rect">
               <a:avLst/>
             </a:prstGeom>
           </p:spPr>
           <p:txBody>
-            <a:bodyPr anchor="t" rtlCol="false" tIns="0" lIns="0" bIns="0" rIns="0">
+            <a:bodyPr wrap="square" lIns="0" tIns="0" rIns="0" bIns="0" rtlCol="0" anchor="t">
               <a:spAutoFit/>
             </a:bodyPr>
             <a:lstStyle/>
             <a:p>
-              <a:pPr algn="l" marL="0" indent="0" lvl="0">
+              <a:pPr marL="0" lvl="0" indent="0" algn="l">
                 <a:lnSpc>
                   <a:spcPts val="2811"/>
                 </a:lnSpc>
@@ -3134,118 +3134,63 @@
                 </a:spcBef>
               </a:pPr>
               <a:r>
-                <a:rPr lang="en-US" sz="2811" spc="-56" strike="noStrike" u="none">
+                <a:rPr lang="en-US" sz="9600" u="none" strike="noStrike" spc="-56" dirty="0">
                   <a:solidFill>
-                    <a:srgbClr val="F9FAFB"/>
+                    <a:schemeClr val="accent1"/>
                   </a:solidFill>
-                  <a:latin typeface="Tenor Sans"/>
+                  <a:latin typeface="Sitka Heading" panose="02000505000000020004" pitchFamily="2" charset="0"/>
                   <a:ea typeface="Tenor Sans"/>
                   <a:cs typeface="Tenor Sans"/>
                   <a:sym typeface="Tenor Sans"/>
                 </a:rPr>
-                <a:t>Ministère de l'Enseignement Supérieur et de la Recherche Scientifique</a:t>
+                <a:t>Mini </a:t>
               </a:r>
-            </a:p>
-            <a:p>
-              <a:pPr algn="l" marL="0" indent="0" lvl="0">
-                <a:lnSpc>
-                  <a:spcPts val="2811"/>
-                </a:lnSpc>
-                <a:spcBef>
-                  <a:spcPct val="0"/>
-                </a:spcBef>
-              </a:pPr>
               <a:r>
-                <a:rPr lang="en-US" sz="2811" spc="-56" strike="noStrike" u="none">
+                <a:rPr lang="en-US" sz="9600" u="none" strike="noStrike" spc="-56" dirty="0" err="1">
                   <a:solidFill>
-                    <a:srgbClr val="F9FAFB"/>
+                    <a:schemeClr val="accent1"/>
                   </a:solidFill>
-                  <a:latin typeface="Tenor Sans"/>
+                  <a:latin typeface="Sitka Heading" panose="02000505000000020004" pitchFamily="2" charset="0"/>
                   <a:ea typeface="Tenor Sans"/>
                   <a:cs typeface="Tenor Sans"/>
                   <a:sym typeface="Tenor Sans"/>
                 </a:rPr>
-                <a:t>Faculté des Sciences de Monastir</a:t>
+                <a:t>Projet</a:t>
               </a:r>
-            </a:p>
-            <a:p>
-              <a:pPr algn="l" marL="0" indent="0" lvl="0">
-                <a:lnSpc>
-                  <a:spcPts val="2811"/>
-                </a:lnSpc>
-                <a:spcBef>
-                  <a:spcPct val="0"/>
-                </a:spcBef>
-              </a:pPr>
-            </a:p>
-            <a:p>
-              <a:pPr algn="l" marL="0" indent="0" lvl="0">
-                <a:lnSpc>
-                  <a:spcPts val="2811"/>
-                </a:lnSpc>
-                <a:spcBef>
-                  <a:spcPct val="0"/>
-                </a:spcBef>
-              </a:pPr>
-              <a:r>
-                <a:rPr lang="en-US" sz="2811" spc="-56" strike="noStrike" u="none">
-                  <a:solidFill>
-                    <a:srgbClr val="F9FAFB"/>
-                  </a:solidFill>
-                  <a:latin typeface="Tenor Sans"/>
-                  <a:ea typeface="Tenor Sans"/>
-                  <a:cs typeface="Tenor Sans"/>
-                  <a:sym typeface="Tenor Sans"/>
-                </a:rPr>
-                <a:t>Mini Projet</a:t>
-              </a:r>
-            </a:p>
-            <a:p>
-              <a:pPr algn="l" marL="0" indent="0" lvl="0">
-                <a:lnSpc>
-                  <a:spcPts val="2811"/>
-                </a:lnSpc>
-                <a:spcBef>
-                  <a:spcPct val="0"/>
-                </a:spcBef>
-              </a:pPr>
-              <a:r>
-                <a:rPr lang="en-US" sz="2811" spc="-56" strike="noStrike" u="none">
-                  <a:solidFill>
-                    <a:srgbClr val="F9FAFB"/>
-                  </a:solidFill>
-                  <a:latin typeface="Tenor Sans"/>
-                  <a:ea typeface="Tenor Sans"/>
-                  <a:cs typeface="Tenor Sans"/>
-                  <a:sym typeface="Tenor Sans"/>
-                </a:rPr>
-                <a:t>Fondements Des Réseaux</a:t>
-              </a:r>
+              <a:endParaRPr lang="en-US" sz="9600" u="none" strike="noStrike" spc="-56" dirty="0">
+                <a:solidFill>
+                  <a:schemeClr val="accent1"/>
+                </a:solidFill>
+                <a:latin typeface="Sitka Heading" panose="02000505000000020004" pitchFamily="2" charset="0"/>
+                <a:ea typeface="Tenor Sans"/>
+                <a:cs typeface="Tenor Sans"/>
+                <a:sym typeface="Tenor Sans"/>
+              </a:endParaRPr>
             </a:p>
           </p:txBody>
         </p:sp>
         <p:sp>
           <p:nvSpPr>
-            <p:cNvPr name="TextBox 4" id="4"/>
-            <p:cNvSpPr txBox="true"/>
+            <p:cNvPr id="4" name="TextBox 4"/>
+            <p:cNvSpPr txBox="1"/>
             <p:nvPr/>
           </p:nvSpPr>
           <p:spPr>
-            <a:xfrm rot="0">
+            <a:xfrm>
               <a:off x="0" y="10060334"/>
-              <a:ext cx="7320742" cy="817905"/>
+              <a:ext cx="7320742" cy="395664"/>
             </a:xfrm>
             <a:prstGeom prst="rect">
               <a:avLst/>
             </a:prstGeom>
           </p:spPr>
           <p:txBody>
-            <a:bodyPr anchor="t" rtlCol="false" tIns="0" lIns="0" bIns="0" rIns="0">
+            <a:bodyPr lIns="0" tIns="0" rIns="0" bIns="0" rtlCol="0" anchor="t">
               <a:spAutoFit/>
             </a:bodyPr>
             <a:lstStyle/>
             <a:p>
-              <a:pPr algn="l" marL="0" indent="0" lvl="0">
+              <a:pPr marL="0" lvl="0" indent="0" algn="l">
                 <a:lnSpc>
                   <a:spcPts val="2519"/>
                 </a:lnSpc>
@@ -3254,7 +3199,7 @@
                 </a:spcBef>
               </a:pPr>
               <a:r>
-                <a:rPr lang="en-US" sz="1799" strike="noStrike" u="none">
+                <a:rPr lang="en-US" sz="1799" u="none" strike="noStrike" dirty="0">
                   <a:solidFill>
                     <a:srgbClr val="F9FAFB"/>
                   </a:solidFill>
@@ -3263,7 +3208,7 @@
                   <a:cs typeface="Clear Sans"/>
                   <a:sym typeface="Clear Sans"/>
                 </a:rPr>
-                <a:t>NOM &amp; PRÉNOM : HAROUN MAAREF &amp; MOUFEZ KHADROUI |  </a:t>
+                <a:t>NOM &amp; PRÉNOM : MOUFEZ KHADROUI |  </a:t>
               </a:r>
             </a:p>
           </p:txBody>
@@ -3271,12 +3216,12 @@
       </p:grpSp>
       <p:grpSp>
         <p:nvGrpSpPr>
-          <p:cNvPr name="Group 5" id="5"/>
+          <p:cNvPr id="5" name="Group 5"/>
           <p:cNvGrpSpPr/>
           <p:nvPr/>
         </p:nvGrpSpPr>
         <p:grpSpPr>
-          <a:xfrm rot="0">
+          <a:xfrm>
             <a:off x="12172950" y="0"/>
             <a:ext cx="6115050" cy="10287000"/>
             <a:chOff x="0" y="0"/>
@@ -3285,12 +3230,12 @@
         </p:grpSpPr>
         <p:sp>
           <p:nvSpPr>
-            <p:cNvPr name="Freeform 6" id="6"/>
+            <p:cNvPr id="6" name="Freeform 6"/>
             <p:cNvSpPr/>
             <p:nvPr/>
           </p:nvSpPr>
           <p:spPr>
-            <a:xfrm flipH="false" flipV="false" rot="0">
+            <a:xfrm>
               <a:off x="0" y="0"/>
               <a:ext cx="947381" cy="1593725"/>
             </a:xfrm>
@@ -3299,9 +3244,9 @@
               <a:gdLst/>
               <a:ahLst/>
               <a:cxnLst/>
-              <a:rect r="r" b="b" t="t" l="l"/>
+              <a:rect l="l" t="t" r="r" b="b"/>
               <a:pathLst>
-                <a:path h="1593725" w="947381">
+                <a:path w="947381" h="1593725">
                   <a:moveTo>
                     <a:pt x="0" y="0"/>
                   </a:moveTo>
@@ -3321,20 +3266,27 @@
             <a:blipFill>
               <a:blip r:embed="rId2"/>
               <a:stretch>
-                <a:fillRect l="0" t="-58" r="0" b="-58"/>
+                <a:fillRect t="-58" b="-58"/>
               </a:stretch>
             </a:blipFill>
           </p:spPr>
+          <p:txBody>
+            <a:bodyPr/>
+            <a:lstStyle/>
+            <a:p>
+              <a:endParaRPr lang="en-GB"/>
+            </a:p>
+          </p:txBody>
         </p:sp>
       </p:grpSp>
       <p:sp>
         <p:nvSpPr>
-          <p:cNvPr name="Freeform 7" id="7"/>
+          <p:cNvPr id="7" name="Freeform 7"/>
           <p:cNvSpPr/>
           <p:nvPr/>
         </p:nvSpPr>
         <p:spPr>
-          <a:xfrm flipH="false" flipV="false" rot="0">
+          <a:xfrm>
             <a:off x="8774635" y="7396104"/>
             <a:ext cx="6274865" cy="4114800"/>
           </a:xfrm>
@@ -3343,9 +3295,9 @@
             <a:gdLst/>
             <a:ahLst/>
             <a:cxnLst/>
-            <a:rect r="r" b="b" t="t" l="l"/>
+            <a:rect l="l" t="t" r="r" b="b"/>
             <a:pathLst>
-              <a:path h="4114800" w="6274865">
+              <a:path w="6274865" h="4114800">
                 <a:moveTo>
                   <a:pt x="0" y="0"/>
                 </a:moveTo>
@@ -3366,15 +3318,15 @@
             </a:pathLst>
           </a:custGeom>
           <a:blipFill>
-            <a:blip r:embed="rId3">
+            <a:blip>
               <a:extLst>
                 <a:ext uri="{96DAC541-7B7A-43D3-8B79-37D633B846F1}">
-                  <asvg:svgBlip xmlns:asvg="http://schemas.microsoft.com/office/drawing/2016/SVG/main" r:embed="rId4"/>
+                  <asvg:svgBlip xmlns:asvg="http://schemas.microsoft.com/office/drawing/2016/SVG/main" r:embed="rId3"/>
                 </a:ext>
               </a:extLst>
             </a:blip>
             <a:stretch>
-              <a:fillRect l="0" t="0" r="0" b="0"/>
+              <a:fillRect/>
             </a:stretch>
           </a:blipFill>
           <a:ln cap="sq">
@@ -3383,6 +3335,13 @@
             <a:miter/>
           </a:ln>
         </p:spPr>
+        <p:txBody>
+          <a:bodyPr/>
+          <a:lstStyle/>
+          <a:p>
+            <a:endParaRPr lang="en-GB"/>
+          </a:p>
+        </p:txBody>
       </p:sp>
     </p:spTree>
   </p:cSld>
@@ -3393,13 +3352,14 @@
 </file>
 
 <file path=ppt/slides/slide2.xml><?xml version="1.0" encoding="utf-8"?>
-<p:sld xmlns:p="http://schemas.openxmlformats.org/presentationml/2006/main" xmlns:a="http://schemas.openxmlformats.org/drawingml/2006/main" xmlns:r="http://schemas.openxmlformats.org/officeDocument/2006/relationships">
+<p:sld xmlns:a="http://schemas.openxmlformats.org/drawingml/2006/main" xmlns:r="http://schemas.openxmlformats.org/officeDocument/2006/relationships" xmlns:p="http://schemas.openxmlformats.org/presentationml/2006/main">
   <p:cSld>
     <p:bg>
       <p:bgPr>
         <a:solidFill>
           <a:srgbClr val="1F2937"/>
         </a:solidFill>
+        <a:effectLst/>
       </p:bgPr>
     </p:bg>
     <p:spTree>
@@ -3418,12 +3378,12 @@
       </p:grpSpPr>
       <p:sp>
         <p:nvSpPr>
-          <p:cNvPr name="TextBox 2" id="2"/>
-          <p:cNvSpPr txBox="true"/>
+          <p:cNvPr id="2" name="TextBox 2"/>
+          <p:cNvSpPr txBox="1"/>
           <p:nvPr/>
         </p:nvSpPr>
         <p:spPr>
-          <a:xfrm rot="0">
+          <a:xfrm>
             <a:off x="666750" y="1562086"/>
             <a:ext cx="8324850" cy="2114550"/>
           </a:xfrm>
@@ -3432,12 +3392,12 @@
           </a:prstGeom>
         </p:spPr>
         <p:txBody>
-          <a:bodyPr anchor="t" rtlCol="false" tIns="0" lIns="0" bIns="0" rIns="0">
+          <a:bodyPr lIns="0" tIns="0" rIns="0" bIns="0" rtlCol="0" anchor="t">
             <a:spAutoFit/>
           </a:bodyPr>
           <a:lstStyle/>
           <a:p>
-            <a:pPr algn="l" marL="0" indent="0" lvl="0">
+            <a:pPr marL="0" lvl="0" indent="0" algn="l">
               <a:lnSpc>
                 <a:spcPts val="8399"/>
               </a:lnSpc>
@@ -3446,7 +3406,7 @@
               </a:spcBef>
             </a:pPr>
             <a:r>
-              <a:rPr lang="en-US" sz="6999" spc="-139" strike="noStrike" u="none">
+              <a:rPr lang="en-US" sz="6999" u="none" strike="noStrike" spc="-139">
                 <a:solidFill>
                   <a:srgbClr val="3B82F6"/>
                 </a:solidFill>
@@ -3462,12 +3422,12 @@
       </p:sp>
       <p:grpSp>
         <p:nvGrpSpPr>
-          <p:cNvPr name="Group 3" id="3"/>
+          <p:cNvPr id="3" name="Group 3"/>
           <p:cNvGrpSpPr/>
           <p:nvPr/>
         </p:nvGrpSpPr>
         <p:grpSpPr>
-          <a:xfrm rot="0">
+          <a:xfrm>
             <a:off x="11346717" y="695282"/>
             <a:ext cx="5448300" cy="7738427"/>
             <a:chOff x="0" y="0"/>
@@ -3476,12 +3436,12 @@
         </p:grpSpPr>
         <p:sp>
           <p:nvSpPr>
-            <p:cNvPr name="TextBox 4" id="4"/>
-            <p:cNvSpPr txBox="true"/>
+            <p:cNvPr id="4" name="TextBox 4"/>
+            <p:cNvSpPr txBox="1"/>
             <p:nvPr/>
           </p:nvSpPr>
           <p:spPr>
-            <a:xfrm rot="0">
+            <a:xfrm>
               <a:off x="0" y="-47625"/>
               <a:ext cx="7264400" cy="530032"/>
             </a:xfrm>
@@ -3490,12 +3450,12 @@
             </a:prstGeom>
           </p:spPr>
           <p:txBody>
-            <a:bodyPr anchor="t" rtlCol="false" tIns="0" lIns="0" bIns="0" rIns="0">
+            <a:bodyPr lIns="0" tIns="0" rIns="0" bIns="0" rtlCol="0" anchor="t">
               <a:spAutoFit/>
             </a:bodyPr>
             <a:lstStyle/>
             <a:p>
-              <a:pPr algn="l" marL="0" indent="0" lvl="0">
+              <a:pPr marL="0" lvl="0" indent="0" algn="l">
                 <a:lnSpc>
                   <a:spcPts val="3360"/>
                 </a:lnSpc>
@@ -3504,7 +3464,7 @@
                 </a:spcBef>
               </a:pPr>
               <a:r>
-                <a:rPr lang="en-US" b="true" sz="2400" strike="noStrike" u="none">
+                <a:rPr lang="en-US" sz="2400" b="1" u="none" strike="noStrike">
                   <a:solidFill>
                     <a:srgbClr val="9CA3AF"/>
                   </a:solidFill>
@@ -3520,12 +3480,12 @@
         </p:sp>
         <p:sp>
           <p:nvSpPr>
-            <p:cNvPr name="TextBox 5" id="5"/>
-            <p:cNvSpPr txBox="true"/>
+            <p:cNvPr id="5" name="TextBox 5"/>
+            <p:cNvSpPr txBox="1"/>
             <p:nvPr/>
           </p:nvSpPr>
           <p:spPr>
-            <a:xfrm rot="0">
+            <a:xfrm>
               <a:off x="0" y="878058"/>
               <a:ext cx="7264400" cy="4878136"/>
             </a:xfrm>
@@ -3534,12 +3494,12 @@
             </a:prstGeom>
           </p:spPr>
           <p:txBody>
-            <a:bodyPr anchor="t" rtlCol="false" tIns="0" lIns="0" bIns="0" rIns="0">
+            <a:bodyPr lIns="0" tIns="0" rIns="0" bIns="0" rtlCol="0" anchor="t">
               <a:spAutoFit/>
             </a:bodyPr>
             <a:lstStyle/>
             <a:p>
-              <a:pPr algn="l" marL="0" indent="0" lvl="0">
+              <a:pPr marL="0" lvl="0" indent="0" algn="l">
                 <a:lnSpc>
                   <a:spcPts val="2939"/>
                 </a:lnSpc>
@@ -3548,7 +3508,7 @@
                 </a:spcBef>
               </a:pPr>
               <a:r>
-                <a:rPr lang="en-US" sz="2099" strike="noStrike" u="none">
+                <a:rPr lang="en-US" sz="2099" u="none" strike="noStrike">
                   <a:solidFill>
                     <a:srgbClr val="F9FAFB"/>
                   </a:solidFill>
@@ -3564,12 +3524,12 @@
         </p:sp>
         <p:sp>
           <p:nvSpPr>
-            <p:cNvPr name="TextBox 6" id="6"/>
-            <p:cNvSpPr txBox="true"/>
+            <p:cNvPr id="6" name="TextBox 6"/>
+            <p:cNvSpPr txBox="1"/>
             <p:nvPr/>
           </p:nvSpPr>
           <p:spPr>
-            <a:xfrm rot="0">
+            <a:xfrm>
               <a:off x="0" y="6964899"/>
               <a:ext cx="7264400" cy="530032"/>
             </a:xfrm>
@@ -3578,12 +3538,12 @@
             </a:prstGeom>
           </p:spPr>
           <p:txBody>
-            <a:bodyPr anchor="t" rtlCol="false" tIns="0" lIns="0" bIns="0" rIns="0">
+            <a:bodyPr lIns="0" tIns="0" rIns="0" bIns="0" rtlCol="0" anchor="t">
               <a:spAutoFit/>
             </a:bodyPr>
             <a:lstStyle/>
             <a:p>
-              <a:pPr algn="l" marL="0" indent="0" lvl="0">
+              <a:pPr marL="0" lvl="0" indent="0" algn="l">
                 <a:lnSpc>
                   <a:spcPts val="3360"/>
                 </a:lnSpc>
@@ -3592,7 +3552,7 @@
                 </a:spcBef>
               </a:pPr>
               <a:r>
-                <a:rPr lang="en-US" b="true" sz="2400" strike="noStrike" u="none">
+                <a:rPr lang="en-US" sz="2400" b="1" u="none" strike="noStrike">
                   <a:solidFill>
                     <a:srgbClr val="9CA3AF"/>
                   </a:solidFill>
@@ -3608,12 +3568,12 @@
         </p:sp>
         <p:sp>
           <p:nvSpPr>
-            <p:cNvPr name="TextBox 7" id="7"/>
-            <p:cNvSpPr txBox="true"/>
+            <p:cNvPr id="7" name="TextBox 7"/>
+            <p:cNvSpPr txBox="1"/>
             <p:nvPr/>
           </p:nvSpPr>
           <p:spPr>
-            <a:xfrm rot="0">
+            <a:xfrm>
               <a:off x="0" y="7890582"/>
               <a:ext cx="7264400" cy="2427320"/>
             </a:xfrm>
@@ -3622,12 +3582,12 @@
             </a:prstGeom>
           </p:spPr>
           <p:txBody>
-            <a:bodyPr anchor="t" rtlCol="false" tIns="0" lIns="0" bIns="0" rIns="0">
+            <a:bodyPr lIns="0" tIns="0" rIns="0" bIns="0" rtlCol="0" anchor="t">
               <a:spAutoFit/>
             </a:bodyPr>
             <a:lstStyle/>
             <a:p>
-              <a:pPr algn="l" marL="0" indent="0" lvl="0">
+              <a:pPr marL="0" lvl="0" indent="0" algn="l">
                 <a:lnSpc>
                   <a:spcPts val="2939"/>
                 </a:lnSpc>
@@ -3636,7 +3596,7 @@
                 </a:spcBef>
               </a:pPr>
               <a:r>
-                <a:rPr lang="en-US" sz="2099" strike="noStrike" u="none">
+                <a:rPr lang="en-US" sz="2099" u="none" strike="noStrike">
                   <a:solidFill>
                     <a:srgbClr val="F9FAFB"/>
                   </a:solidFill>
@@ -3653,12 +3613,12 @@
       </p:grpSp>
       <p:sp>
         <p:nvSpPr>
-          <p:cNvPr name="Freeform 8" id="8"/>
+          <p:cNvPr id="8" name="Freeform 8"/>
           <p:cNvSpPr/>
           <p:nvPr/>
         </p:nvSpPr>
         <p:spPr>
-          <a:xfrm flipH="false" flipV="false" rot="0">
+          <a:xfrm>
             <a:off x="-3137432" y="7200900"/>
             <a:ext cx="6274865" cy="4114800"/>
           </a:xfrm>
@@ -3667,9 +3627,9 @@
             <a:gdLst/>
             <a:ahLst/>
             <a:cxnLst/>
-            <a:rect r="r" b="b" t="t" l="l"/>
+            <a:rect l="l" t="t" r="r" b="b"/>
             <a:pathLst>
-              <a:path h="4114800" w="6274865">
+              <a:path w="6274865" h="4114800">
                 <a:moveTo>
                   <a:pt x="0" y="0"/>
                 </a:moveTo>
@@ -3690,15 +3650,15 @@
             </a:pathLst>
           </a:custGeom>
           <a:blipFill>
-            <a:blip r:embed="rId2">
+            <a:blip>
               <a:extLst>
                 <a:ext uri="{96DAC541-7B7A-43D3-8B79-37D633B846F1}">
-                  <asvg:svgBlip xmlns:asvg="http://schemas.microsoft.com/office/drawing/2016/SVG/main" r:embed="rId3"/>
+                  <asvg:svgBlip xmlns:asvg="http://schemas.microsoft.com/office/drawing/2016/SVG/main" r:embed="rId2"/>
                 </a:ext>
               </a:extLst>
             </a:blip>
             <a:stretch>
-              <a:fillRect l="0" t="0" r="0" b="0"/>
+              <a:fillRect/>
             </a:stretch>
           </a:blipFill>
           <a:ln cap="sq">
@@ -3707,6 +3667,13 @@
             <a:miter/>
           </a:ln>
         </p:spPr>
+        <p:txBody>
+          <a:bodyPr/>
+          <a:lstStyle/>
+          <a:p>
+            <a:endParaRPr lang="en-GB"/>
+          </a:p>
+        </p:txBody>
       </p:sp>
     </p:spTree>
   </p:cSld>
@@ -3717,13 +3684,14 @@
 </file>
 
 <file path=ppt/slides/slide3.xml><?xml version="1.0" encoding="utf-8"?>
-<p:sld xmlns:p="http://schemas.openxmlformats.org/presentationml/2006/main" xmlns:a="http://schemas.openxmlformats.org/drawingml/2006/main" xmlns:r="http://schemas.openxmlformats.org/officeDocument/2006/relationships">
+<p:sld xmlns:a="http://schemas.openxmlformats.org/drawingml/2006/main" xmlns:r="http://schemas.openxmlformats.org/officeDocument/2006/relationships" xmlns:p="http://schemas.openxmlformats.org/presentationml/2006/main">
   <p:cSld>
     <p:bg>
       <p:bgPr>
         <a:solidFill>
           <a:srgbClr val="1F2937"/>
         </a:solidFill>
+        <a:effectLst/>
       </p:bgPr>
     </p:bg>
     <p:spTree>
@@ -3742,12 +3710,12 @@
       </p:grpSpPr>
       <p:sp>
         <p:nvSpPr>
-          <p:cNvPr name="Freeform 2" id="2"/>
+          <p:cNvPr id="2" name="Freeform 2"/>
           <p:cNvSpPr/>
           <p:nvPr/>
         </p:nvSpPr>
         <p:spPr>
-          <a:xfrm flipH="false" flipV="false" rot="-10087176">
+          <a:xfrm rot="-10087176">
             <a:off x="3189187" y="-10712043"/>
             <a:ext cx="14136818" cy="12003443"/>
           </a:xfrm>
@@ -3756,9 +3724,9 @@
             <a:gdLst/>
             <a:ahLst/>
             <a:cxnLst/>
-            <a:rect r="r" b="b" t="t" l="l"/>
+            <a:rect l="l" t="t" r="r" b="b"/>
             <a:pathLst>
-              <a:path h="12003443" w="14136818">
+              <a:path w="14136818" h="12003443">
                 <a:moveTo>
                   <a:pt x="0" y="0"/>
                 </a:moveTo>
@@ -3779,27 +3747,34 @@
             </a:pathLst>
           </a:custGeom>
           <a:blipFill>
-            <a:blip r:embed="rId2">
+            <a:blip>
               <a:extLst>
                 <a:ext uri="{96DAC541-7B7A-43D3-8B79-37D633B846F1}">
-                  <asvg:svgBlip xmlns:asvg="http://schemas.microsoft.com/office/drawing/2016/SVG/main" r:embed="rId3"/>
+                  <asvg:svgBlip xmlns:asvg="http://schemas.microsoft.com/office/drawing/2016/SVG/main" r:embed="rId2"/>
                 </a:ext>
               </a:extLst>
             </a:blip>
             <a:stretch>
-              <a:fillRect l="0" t="0" r="0" b="0"/>
+              <a:fillRect/>
             </a:stretch>
           </a:blipFill>
         </p:spPr>
-      </p:sp>
-      <p:sp>
-        <p:nvSpPr>
-          <p:cNvPr name="TextBox 3" id="3"/>
-          <p:cNvSpPr txBox="true"/>
+        <p:txBody>
+          <a:bodyPr/>
+          <a:lstStyle/>
+          <a:p>
+            <a:endParaRPr lang="en-GB"/>
+          </a:p>
+        </p:txBody>
+      </p:sp>
+      <p:sp>
+        <p:nvSpPr>
+          <p:cNvPr id="3" name="TextBox 3"/>
+          <p:cNvSpPr txBox="1"/>
           <p:nvPr/>
         </p:nvSpPr>
         <p:spPr>
-          <a:xfrm rot="0">
+          <a:xfrm>
             <a:off x="2105025" y="1562100"/>
             <a:ext cx="14077950" cy="1055948"/>
           </a:xfrm>
@@ -3808,12 +3783,12 @@
           </a:prstGeom>
         </p:spPr>
         <p:txBody>
-          <a:bodyPr anchor="t" rtlCol="false" tIns="0" lIns="0" bIns="0" rIns="0">
+          <a:bodyPr lIns="0" tIns="0" rIns="0" bIns="0" rtlCol="0" anchor="t">
             <a:spAutoFit/>
           </a:bodyPr>
           <a:lstStyle/>
           <a:p>
-            <a:pPr algn="ctr" marL="0" indent="0" lvl="0">
+            <a:pPr marL="0" lvl="0" indent="0" algn="ctr">
               <a:lnSpc>
                 <a:spcPts val="8399"/>
               </a:lnSpc>
@@ -3822,7 +3797,7 @@
               </a:spcBef>
             </a:pPr>
             <a:r>
-              <a:rPr lang="en-US" sz="6999" spc="-139" strike="noStrike" u="none">
+              <a:rPr lang="en-US" sz="6999" u="none" strike="noStrike" spc="-139" dirty="0">
                 <a:solidFill>
                   <a:srgbClr val="3B82F6"/>
                 </a:solidFill>
@@ -3831,19 +3806,19 @@
                 <a:cs typeface="Tenor Sans"/>
                 <a:sym typeface="Tenor Sans"/>
               </a:rPr>
-              <a:t>Chapitre 1 : Les Réseaux</a:t>
+              <a:t>Les Réseaux</a:t>
             </a:r>
           </a:p>
         </p:txBody>
       </p:sp>
       <p:grpSp>
         <p:nvGrpSpPr>
-          <p:cNvPr name="Group 4" id="4"/>
+          <p:cNvPr id="4" name="Group 4"/>
           <p:cNvGrpSpPr/>
           <p:nvPr/>
         </p:nvGrpSpPr>
         <p:grpSpPr>
-          <a:xfrm rot="0">
+          <a:xfrm>
             <a:off x="666750" y="5143500"/>
             <a:ext cx="5448300" cy="3783002"/>
             <a:chOff x="0" y="0"/>
@@ -3852,12 +3827,12 @@
         </p:grpSpPr>
         <p:sp>
           <p:nvSpPr>
-            <p:cNvPr name="TextBox 5" id="5"/>
-            <p:cNvSpPr txBox="true"/>
+            <p:cNvPr id="5" name="TextBox 5"/>
+            <p:cNvSpPr txBox="1"/>
             <p:nvPr/>
           </p:nvSpPr>
           <p:spPr>
-            <a:xfrm rot="0">
+            <a:xfrm>
               <a:off x="0" y="-47625"/>
               <a:ext cx="7264400" cy="525145"/>
             </a:xfrm>
@@ -3866,12 +3841,12 @@
             </a:prstGeom>
           </p:spPr>
           <p:txBody>
-            <a:bodyPr anchor="t" rtlCol="false" tIns="0" lIns="0" bIns="0" rIns="0">
+            <a:bodyPr lIns="0" tIns="0" rIns="0" bIns="0" rtlCol="0" anchor="t">
               <a:spAutoFit/>
             </a:bodyPr>
             <a:lstStyle/>
             <a:p>
-              <a:pPr algn="ctr" marL="0" indent="0" lvl="0">
+              <a:pPr marL="0" lvl="0" indent="0" algn="ctr">
                 <a:lnSpc>
                   <a:spcPts val="3359"/>
                 </a:lnSpc>
@@ -3880,7 +3855,7 @@
                 </a:spcBef>
               </a:pPr>
               <a:r>
-                <a:rPr lang="en-US" b="true" sz="2400" strike="noStrike" u="none">
+                <a:rPr lang="en-US" sz="2400" b="1" u="none" strike="noStrike">
                   <a:solidFill>
                     <a:srgbClr val="9CA3AF"/>
                   </a:solidFill>
@@ -3896,12 +3871,12 @@
         </p:sp>
         <p:sp>
           <p:nvSpPr>
-            <p:cNvPr name="TextBox 6" id="6"/>
-            <p:cNvSpPr txBox="true"/>
+            <p:cNvPr id="6" name="TextBox 6"/>
+            <p:cNvSpPr txBox="1"/>
             <p:nvPr/>
           </p:nvSpPr>
           <p:spPr>
-            <a:xfrm rot="0">
+            <a:xfrm>
               <a:off x="0" y="1146193"/>
               <a:ext cx="7264400" cy="3897809"/>
             </a:xfrm>
@@ -3910,12 +3885,12 @@
             </a:prstGeom>
           </p:spPr>
           <p:txBody>
-            <a:bodyPr anchor="t" rtlCol="false" tIns="0" lIns="0" bIns="0" rIns="0">
+            <a:bodyPr lIns="0" tIns="0" rIns="0" bIns="0" rtlCol="0" anchor="t">
               <a:spAutoFit/>
             </a:bodyPr>
             <a:lstStyle/>
             <a:p>
-              <a:pPr algn="ctr" marL="0" indent="0" lvl="0">
+              <a:pPr marL="0" lvl="0" indent="0" algn="ctr">
                 <a:lnSpc>
                   <a:spcPts val="2939"/>
                 </a:lnSpc>
@@ -3924,7 +3899,7 @@
                 </a:spcBef>
               </a:pPr>
               <a:r>
-                <a:rPr lang="en-US" sz="2099" strike="noStrike" u="none">
+                <a:rPr lang="en-US" sz="2099" u="none" strike="noStrike">
                   <a:solidFill>
                     <a:srgbClr val="F9FAFB"/>
                   </a:solidFill>
@@ -3941,12 +3916,12 @@
       </p:grpSp>
       <p:grpSp>
         <p:nvGrpSpPr>
-          <p:cNvPr name="Group 7" id="7"/>
+          <p:cNvPr id="7" name="Group 7"/>
           <p:cNvGrpSpPr/>
           <p:nvPr/>
         </p:nvGrpSpPr>
         <p:grpSpPr>
-          <a:xfrm rot="0">
+          <a:xfrm>
             <a:off x="6419850" y="5143500"/>
             <a:ext cx="5448300" cy="4150624"/>
             <a:chOff x="0" y="0"/>
@@ -3955,12 +3930,12 @@
         </p:grpSpPr>
         <p:sp>
           <p:nvSpPr>
-            <p:cNvPr name="TextBox 8" id="8"/>
-            <p:cNvSpPr txBox="true"/>
+            <p:cNvPr id="8" name="TextBox 8"/>
+            <p:cNvSpPr txBox="1"/>
             <p:nvPr/>
           </p:nvSpPr>
           <p:spPr>
-            <a:xfrm rot="0">
+            <a:xfrm>
               <a:off x="0" y="-47625"/>
               <a:ext cx="7264400" cy="525145"/>
             </a:xfrm>
@@ -3969,12 +3944,12 @@
             </a:prstGeom>
           </p:spPr>
           <p:txBody>
-            <a:bodyPr anchor="t" rtlCol="false" tIns="0" lIns="0" bIns="0" rIns="0">
+            <a:bodyPr lIns="0" tIns="0" rIns="0" bIns="0" rtlCol="0" anchor="t">
               <a:spAutoFit/>
             </a:bodyPr>
             <a:lstStyle/>
             <a:p>
-              <a:pPr algn="ctr" marL="0" indent="0" lvl="0">
+              <a:pPr marL="0" lvl="0" indent="0" algn="ctr">
                 <a:lnSpc>
                   <a:spcPts val="3359"/>
                 </a:lnSpc>
@@ -3983,7 +3958,7 @@
                 </a:spcBef>
               </a:pPr>
               <a:r>
-                <a:rPr lang="en-US" b="true" sz="2400" strike="noStrike" u="none">
+                <a:rPr lang="en-US" sz="2400" b="1" u="none" strike="noStrike">
                   <a:solidFill>
                     <a:srgbClr val="9CA3AF"/>
                   </a:solidFill>
@@ -3999,12 +3974,12 @@
         </p:sp>
         <p:sp>
           <p:nvSpPr>
-            <p:cNvPr name="TextBox 9" id="9"/>
-            <p:cNvSpPr txBox="true"/>
+            <p:cNvPr id="9" name="TextBox 9"/>
+            <p:cNvSpPr txBox="1"/>
             <p:nvPr/>
           </p:nvSpPr>
           <p:spPr>
-            <a:xfrm rot="0">
+            <a:xfrm>
               <a:off x="0" y="1146193"/>
               <a:ext cx="7264400" cy="4387973"/>
             </a:xfrm>
@@ -4013,12 +3988,12 @@
             </a:prstGeom>
           </p:spPr>
           <p:txBody>
-            <a:bodyPr anchor="t" rtlCol="false" tIns="0" lIns="0" bIns="0" rIns="0">
+            <a:bodyPr lIns="0" tIns="0" rIns="0" bIns="0" rtlCol="0" anchor="t">
               <a:spAutoFit/>
             </a:bodyPr>
             <a:lstStyle/>
             <a:p>
-              <a:pPr algn="ctr" marL="0" indent="0" lvl="0">
+              <a:pPr marL="0" lvl="0" indent="0" algn="ctr">
                 <a:lnSpc>
                   <a:spcPts val="2939"/>
                 </a:lnSpc>
@@ -4027,7 +4002,7 @@
                 </a:spcBef>
               </a:pPr>
               <a:r>
-                <a:rPr lang="en-US" sz="2099" strike="noStrike" u="none">
+                <a:rPr lang="en-US" sz="2099" u="none" strike="noStrike">
                   <a:solidFill>
                     <a:srgbClr val="F9FAFB"/>
                   </a:solidFill>
@@ -4044,12 +4019,12 @@
       </p:grpSp>
       <p:grpSp>
         <p:nvGrpSpPr>
-          <p:cNvPr name="Group 10" id="10"/>
+          <p:cNvPr id="10" name="Group 10"/>
           <p:cNvGrpSpPr/>
           <p:nvPr/>
         </p:nvGrpSpPr>
         <p:grpSpPr>
-          <a:xfrm rot="0">
+          <a:xfrm>
             <a:off x="12172950" y="5143500"/>
             <a:ext cx="5448300" cy="3783002"/>
             <a:chOff x="0" y="0"/>
@@ -4058,12 +4033,12 @@
         </p:grpSpPr>
         <p:sp>
           <p:nvSpPr>
-            <p:cNvPr name="TextBox 11" id="11"/>
-            <p:cNvSpPr txBox="true"/>
+            <p:cNvPr id="11" name="TextBox 11"/>
+            <p:cNvSpPr txBox="1"/>
             <p:nvPr/>
           </p:nvSpPr>
           <p:spPr>
-            <a:xfrm rot="0">
+            <a:xfrm>
               <a:off x="0" y="-47625"/>
               <a:ext cx="7264400" cy="525145"/>
             </a:xfrm>
@@ -4072,12 +4047,12 @@
             </a:prstGeom>
           </p:spPr>
           <p:txBody>
-            <a:bodyPr anchor="t" rtlCol="false" tIns="0" lIns="0" bIns="0" rIns="0">
+            <a:bodyPr lIns="0" tIns="0" rIns="0" bIns="0" rtlCol="0" anchor="t">
               <a:spAutoFit/>
             </a:bodyPr>
             <a:lstStyle/>
             <a:p>
-              <a:pPr algn="ctr" marL="0" indent="0" lvl="0">
+              <a:pPr marL="0" lvl="0" indent="0" algn="ctr">
                 <a:lnSpc>
                   <a:spcPts val="3359"/>
                 </a:lnSpc>
@@ -4086,7 +4061,7 @@
                 </a:spcBef>
               </a:pPr>
               <a:r>
-                <a:rPr lang="en-US" b="true" sz="2400" strike="noStrike" u="none">
+                <a:rPr lang="en-US" sz="2400" b="1" u="none" strike="noStrike">
                   <a:solidFill>
                     <a:srgbClr val="9CA3AF"/>
                   </a:solidFill>
@@ -4102,12 +4077,12 @@
         </p:sp>
         <p:sp>
           <p:nvSpPr>
-            <p:cNvPr name="TextBox 12" id="12"/>
-            <p:cNvSpPr txBox="true"/>
+            <p:cNvPr id="12" name="TextBox 12"/>
+            <p:cNvSpPr txBox="1"/>
             <p:nvPr/>
           </p:nvSpPr>
           <p:spPr>
-            <a:xfrm rot="0">
+            <a:xfrm>
               <a:off x="0" y="1146193"/>
               <a:ext cx="7264400" cy="3897809"/>
             </a:xfrm>
@@ -4116,12 +4091,12 @@
             </a:prstGeom>
           </p:spPr>
           <p:txBody>
-            <a:bodyPr anchor="t" rtlCol="false" tIns="0" lIns="0" bIns="0" rIns="0">
+            <a:bodyPr lIns="0" tIns="0" rIns="0" bIns="0" rtlCol="0" anchor="t">
               <a:spAutoFit/>
             </a:bodyPr>
             <a:lstStyle/>
             <a:p>
-              <a:pPr algn="ctr" marL="0" indent="0" lvl="0">
+              <a:pPr marL="0" lvl="0" indent="0" algn="ctr">
                 <a:lnSpc>
                   <a:spcPts val="2939"/>
                 </a:lnSpc>
@@ -4130,7 +4105,7 @@
                 </a:spcBef>
               </a:pPr>
               <a:r>
-                <a:rPr lang="en-US" sz="2099" strike="noStrike" u="none">
+                <a:rPr lang="en-US" sz="2099" u="none" strike="noStrike">
                   <a:solidFill>
                     <a:srgbClr val="F9FAFB"/>
                   </a:solidFill>
@@ -4154,13 +4129,14 @@
 </file>
 
 <file path=ppt/slides/slide4.xml><?xml version="1.0" encoding="utf-8"?>
-<p:sld xmlns:p="http://schemas.openxmlformats.org/presentationml/2006/main" xmlns:a="http://schemas.openxmlformats.org/drawingml/2006/main" xmlns:r="http://schemas.openxmlformats.org/officeDocument/2006/relationships">
+<p:sld xmlns:a="http://schemas.openxmlformats.org/drawingml/2006/main" xmlns:r="http://schemas.openxmlformats.org/officeDocument/2006/relationships" xmlns:p="http://schemas.openxmlformats.org/presentationml/2006/main">
   <p:cSld>
     <p:bg>
       <p:bgPr>
         <a:solidFill>
           <a:srgbClr val="1F2937"/>
         </a:solidFill>
+        <a:effectLst/>
       </p:bgPr>
     </p:bg>
     <p:spTree>
@@ -4179,186 +4155,40 @@
       </p:grpSpPr>
       <p:grpSp>
         <p:nvGrpSpPr>
-          <p:cNvPr name="Group 2" id="2"/>
+          <p:cNvPr id="2" name="Group 2"/>
           <p:cNvGrpSpPr/>
           <p:nvPr/>
         </p:nvGrpSpPr>
         <p:grpSpPr>
-          <a:xfrm rot="0">
-            <a:off x="12172950" y="0"/>
-            <a:ext cx="6115050" cy="10287000"/>
+          <a:xfrm>
+            <a:off x="666750" y="1562100"/>
+            <a:ext cx="8324850" cy="5661660"/>
             <a:chOff x="0" y="0"/>
-            <a:chExt cx="947381" cy="1593725"/>
+            <a:chExt cx="11099800" cy="7548880"/>
           </a:xfrm>
         </p:grpSpPr>
         <p:sp>
           <p:nvSpPr>
-            <p:cNvPr name="Freeform 3" id="3"/>
-            <p:cNvSpPr/>
+            <p:cNvPr id="3" name="TextBox 3"/>
+            <p:cNvSpPr txBox="1"/>
             <p:nvPr/>
           </p:nvSpPr>
           <p:spPr>
-            <a:xfrm flipH="false" flipV="false" rot="0">
+            <a:xfrm>
               <a:off x="0" y="0"/>
-              <a:ext cx="947381" cy="1593725"/>
-            </a:xfrm>
-            <a:custGeom>
-              <a:avLst/>
-              <a:gdLst/>
-              <a:ahLst/>
-              <a:cxnLst/>
-              <a:rect r="r" b="b" t="t" l="l"/>
-              <a:pathLst>
-                <a:path h="1593725" w="947381">
-                  <a:moveTo>
-                    <a:pt x="0" y="0"/>
-                  </a:moveTo>
-                  <a:lnTo>
-                    <a:pt x="947381" y="0"/>
-                  </a:lnTo>
-                  <a:lnTo>
-                    <a:pt x="947381" y="1593725"/>
-                  </a:lnTo>
-                  <a:lnTo>
-                    <a:pt x="0" y="1593725"/>
-                  </a:lnTo>
-                  <a:close/>
-                </a:path>
-              </a:pathLst>
-            </a:custGeom>
-            <a:blipFill>
-              <a:blip r:embed="rId2"/>
-              <a:stretch>
-                <a:fillRect l="0" t="-58" r="0" b="-58"/>
-              </a:stretch>
-            </a:blipFill>
-          </p:spPr>
-        </p:sp>
-      </p:grpSp>
-      <p:grpSp>
-        <p:nvGrpSpPr>
-          <p:cNvPr name="Group 4" id="4"/>
-          <p:cNvGrpSpPr/>
-          <p:nvPr/>
-        </p:nvGrpSpPr>
-        <p:grpSpPr>
-          <a:xfrm rot="0">
-            <a:off x="666750" y="1562100"/>
-            <a:ext cx="9763125" cy="5205703"/>
-            <a:chOff x="0" y="0"/>
-            <a:chExt cx="13017500" cy="6940937"/>
-          </a:xfrm>
-        </p:grpSpPr>
-        <p:sp>
-          <p:nvSpPr>
-            <p:cNvPr name="TextBox 5" id="5"/>
-            <p:cNvSpPr txBox="true"/>
-            <p:nvPr/>
-          </p:nvSpPr>
-          <p:spPr>
-            <a:xfrm rot="0">
-              <a:off x="0" y="3319799"/>
-              <a:ext cx="13017500" cy="525145"/>
+              <a:ext cx="11099800" cy="2819400"/>
             </a:xfrm>
             <a:prstGeom prst="rect">
               <a:avLst/>
             </a:prstGeom>
           </p:spPr>
           <p:txBody>
-            <a:bodyPr anchor="t" rtlCol="false" tIns="0" lIns="0" bIns="0" rIns="0">
+            <a:bodyPr lIns="0" tIns="0" rIns="0" bIns="0" rtlCol="0" anchor="t">
               <a:spAutoFit/>
             </a:bodyPr>
             <a:lstStyle/>
             <a:p>
-              <a:pPr algn="l" marL="0" indent="0" lvl="0">
-                <a:lnSpc>
-                  <a:spcPts val="3359"/>
-                </a:lnSpc>
-                <a:spcBef>
-                  <a:spcPct val="0"/>
-                </a:spcBef>
-              </a:pPr>
-              <a:r>
-                <a:rPr lang="en-US" b="true" sz="2400" strike="noStrike" u="none">
-                  <a:solidFill>
-                    <a:srgbClr val="9CA3AF"/>
-                  </a:solidFill>
-                  <a:latin typeface="Clear Sans Bold"/>
-                  <a:ea typeface="Clear Sans Bold"/>
-                  <a:cs typeface="Clear Sans Bold"/>
-                  <a:sym typeface="Clear Sans Bold"/>
-                </a:rPr>
-                <a:t>SOLUTION IOT PROPOSÉE</a:t>
-              </a:r>
-            </a:p>
-          </p:txBody>
-        </p:sp>
-        <p:sp>
-          <p:nvSpPr>
-            <p:cNvPr name="TextBox 6" id="6"/>
-            <p:cNvSpPr txBox="true"/>
-            <p:nvPr/>
-          </p:nvSpPr>
-          <p:spPr>
-            <a:xfrm rot="0">
-              <a:off x="0" y="4513617"/>
-              <a:ext cx="13017500" cy="2427320"/>
-            </a:xfrm>
-            <a:prstGeom prst="rect">
-              <a:avLst/>
-            </a:prstGeom>
-          </p:spPr>
-          <p:txBody>
-            <a:bodyPr anchor="t" rtlCol="false" tIns="0" lIns="0" bIns="0" rIns="0">
-              <a:spAutoFit/>
-            </a:bodyPr>
-            <a:lstStyle/>
-            <a:p>
-              <a:pPr algn="l" marL="0" indent="0" lvl="0">
-                <a:lnSpc>
-                  <a:spcPts val="2939"/>
-                </a:lnSpc>
-                <a:spcBef>
-                  <a:spcPct val="0"/>
-                </a:spcBef>
-              </a:pPr>
-              <a:r>
-                <a:rPr lang="en-US" sz="2099" strike="noStrike" u="none">
-                  <a:solidFill>
-                    <a:srgbClr val="F9FAFB"/>
-                  </a:solidFill>
-                  <a:latin typeface="Clear Sans"/>
-                  <a:ea typeface="Clear Sans"/>
-                  <a:cs typeface="Clear Sans"/>
-                  <a:sym typeface="Clear Sans"/>
-                </a:rPr>
-                <a:t>Site Salle de Contrôle (192.168.80.0/24) : Smartphone du responsable, sirènes d'alarme, AP01, Switch0, Serveur DHCP. Site Chambre de Malade (192.168.60.0/24) : Smartphone patient, webcam, fenêtre automatique, détecteur de mouvement, AP02, Serveur IoT. Liaison WAN (10.10.10.0/24) : Routeurs Cisco 2901 R1 ↔ R2, routage OSPF.</a:t>
-              </a:r>
-            </a:p>
-          </p:txBody>
-        </p:sp>
-        <p:sp>
-          <p:nvSpPr>
-            <p:cNvPr name="TextBox 7" id="7"/>
-            <p:cNvSpPr txBox="true"/>
-            <p:nvPr/>
-          </p:nvSpPr>
-          <p:spPr>
-            <a:xfrm rot="0">
-              <a:off x="0" y="0"/>
-              <a:ext cx="13017500" cy="2815860"/>
-            </a:xfrm>
-            <a:prstGeom prst="rect">
-              <a:avLst/>
-            </a:prstGeom>
-          </p:spPr>
-          <p:txBody>
-            <a:bodyPr anchor="t" rtlCol="false" tIns="0" lIns="0" bIns="0" rIns="0">
-              <a:spAutoFit/>
-            </a:bodyPr>
-            <a:lstStyle/>
-            <a:p>
-              <a:pPr algn="l" marL="0" indent="0" lvl="0">
+              <a:pPr marL="0" lvl="0" indent="0" algn="l">
                 <a:lnSpc>
                   <a:spcPts val="8399"/>
                 </a:lnSpc>
@@ -4367,336 +4197,7 @@
                 </a:spcBef>
               </a:pPr>
               <a:r>
-                <a:rPr lang="en-US" sz="6999" spc="-139" strike="noStrike" u="none">
-                  <a:solidFill>
-                    <a:srgbClr val="F9FAFB"/>
-                  </a:solidFill>
-                  <a:latin typeface="Tenor Sans"/>
-                  <a:ea typeface="Tenor Sans"/>
-                  <a:cs typeface="Tenor Sans"/>
-                  <a:sym typeface="Tenor Sans"/>
-                </a:rPr>
-                <a:t>Chapitre 2 : Architecture Proposée</a:t>
-              </a:r>
-            </a:p>
-          </p:txBody>
-        </p:sp>
-      </p:grpSp>
-    </p:spTree>
-  </p:cSld>
-  <p:clrMapOvr>
-    <a:masterClrMapping/>
-  </p:clrMapOvr>
-</p:sld>
-</file>
-
-<file path=ppt/slides/slide5.xml><?xml version="1.0" encoding="utf-8"?>
-<p:sld xmlns:p="http://schemas.openxmlformats.org/presentationml/2006/main" xmlns:a="http://schemas.openxmlformats.org/drawingml/2006/main">
-  <p:cSld>
-    <p:bg>
-      <p:bgPr>
-        <a:solidFill>
-          <a:srgbClr val="1F2937"/>
-        </a:solidFill>
-      </p:bgPr>
-    </p:bg>
-    <p:spTree>
-      <p:nvGrpSpPr>
-        <p:cNvPr id="1" name=""/>
-        <p:cNvGrpSpPr/>
-        <p:nvPr/>
-      </p:nvGrpSpPr>
-      <p:grpSpPr>
-        <a:xfrm>
-          <a:off x="0" y="0"/>
-          <a:ext cx="0" cy="0"/>
-          <a:chOff x="0" y="0"/>
-          <a:chExt cx="0" cy="0"/>
-        </a:xfrm>
-      </p:grpSpPr>
-      <p:grpSp>
-        <p:nvGrpSpPr>
-          <p:cNvPr name="Group 2" id="2"/>
-          <p:cNvGrpSpPr/>
-          <p:nvPr/>
-        </p:nvGrpSpPr>
-        <p:grpSpPr>
-          <a:xfrm rot="0">
-            <a:off x="2105025" y="1562100"/>
-            <a:ext cx="6886575" cy="2926080"/>
-            <a:chOff x="0" y="0"/>
-            <a:chExt cx="9182100" cy="3901440"/>
-          </a:xfrm>
-        </p:grpSpPr>
-        <p:sp>
-          <p:nvSpPr>
-            <p:cNvPr name="TextBox 3" id="3"/>
-            <p:cNvSpPr txBox="true"/>
-            <p:nvPr/>
-          </p:nvSpPr>
-          <p:spPr>
-            <a:xfrm rot="0">
-              <a:off x="0" y="0"/>
-              <a:ext cx="9182100" cy="482600"/>
-            </a:xfrm>
-            <a:prstGeom prst="rect">
-              <a:avLst/>
-            </a:prstGeom>
-          </p:spPr>
-          <p:txBody>
-            <a:bodyPr anchor="t" rtlCol="false" tIns="0" lIns="0" bIns="0" rIns="0">
-              <a:spAutoFit/>
-            </a:bodyPr>
-            <a:lstStyle/>
-            <a:p>
-              <a:pPr algn="l" marL="0" indent="0" lvl="0">
-                <a:lnSpc>
-                  <a:spcPts val="2879"/>
-                </a:lnSpc>
-                <a:spcBef>
-                  <a:spcPct val="0"/>
-                </a:spcBef>
-              </a:pPr>
-              <a:r>
-                <a:rPr lang="en-US" b="true" sz="2400" strike="noStrike" u="none">
-                  <a:solidFill>
-                    <a:srgbClr val="9CA3AF"/>
-                  </a:solidFill>
-                  <a:latin typeface="Clear Sans Bold"/>
-                  <a:ea typeface="Clear Sans Bold"/>
-                  <a:cs typeface="Clear Sans Bold"/>
-                  <a:sym typeface="Clear Sans Bold"/>
-                </a:rPr>
-                <a:t>CHAPITRE 3 : SIMULATION DU RÉSEAU</a:t>
-              </a:r>
-            </a:p>
-          </p:txBody>
-        </p:sp>
-        <p:sp>
-          <p:nvSpPr>
-            <p:cNvPr name="TextBox 4" id="4"/>
-            <p:cNvSpPr txBox="true"/>
-            <p:nvPr/>
-          </p:nvSpPr>
-          <p:spPr>
-            <a:xfrm rot="0">
-              <a:off x="0" y="1141095"/>
-              <a:ext cx="9182100" cy="2760345"/>
-            </a:xfrm>
-            <a:prstGeom prst="rect">
-              <a:avLst/>
-            </a:prstGeom>
-          </p:spPr>
-          <p:txBody>
-            <a:bodyPr anchor="t" rtlCol="false" tIns="0" lIns="0" bIns="0" rIns="0">
-              <a:spAutoFit/>
-            </a:bodyPr>
-            <a:lstStyle/>
-            <a:p>
-              <a:pPr algn="l" marL="0" indent="0" lvl="0">
-                <a:lnSpc>
-                  <a:spcPts val="3359"/>
-                </a:lnSpc>
-                <a:spcBef>
-                  <a:spcPct val="0"/>
-                </a:spcBef>
-              </a:pPr>
-              <a:r>
-                <a:rPr lang="en-US" sz="2399" strike="noStrike" u="none">
-                  <a:solidFill>
-                    <a:srgbClr val="F9FAFB"/>
-                  </a:solidFill>
-                  <a:latin typeface="Clear Sans"/>
-                  <a:ea typeface="Clear Sans"/>
-                  <a:cs typeface="Clear Sans"/>
-                  <a:sym typeface="Clear Sans"/>
-                </a:rPr>
-                <a:t>Routeur R1 — Fa0/0 : 192.168.80.1/24, Se0/0 : 10.10.10.1/30, OSPF activé. Routeur R2 — Fa0/0 : 192.168.60.1/24, Se0/0 : 10.10.10.2/30, OSPF activé. DHCP : pool 192.168.80.10-100 (site 1) et 192.168.60.10-100 (site 2).</a:t>
-              </a:r>
-            </a:p>
-          </p:txBody>
-        </p:sp>
-      </p:grpSp>
-      <p:grpSp>
-        <p:nvGrpSpPr>
-          <p:cNvPr name="Group 5" id="5"/>
-          <p:cNvGrpSpPr/>
-          <p:nvPr/>
-        </p:nvGrpSpPr>
-        <p:grpSpPr>
-          <a:xfrm rot="0">
-            <a:off x="9296400" y="1562100"/>
-            <a:ext cx="6886575" cy="3764280"/>
-            <a:chOff x="0" y="0"/>
-            <a:chExt cx="9182100" cy="5019040"/>
-          </a:xfrm>
-        </p:grpSpPr>
-        <p:sp>
-          <p:nvSpPr>
-            <p:cNvPr name="TextBox 6" id="6"/>
-            <p:cNvSpPr txBox="true"/>
-            <p:nvPr/>
-          </p:nvSpPr>
-          <p:spPr>
-            <a:xfrm rot="0">
-              <a:off x="0" y="0"/>
-              <a:ext cx="9182100" cy="482600"/>
-            </a:xfrm>
-            <a:prstGeom prst="rect">
-              <a:avLst/>
-            </a:prstGeom>
-          </p:spPr>
-          <p:txBody>
-            <a:bodyPr anchor="t" rtlCol="false" tIns="0" lIns="0" bIns="0" rIns="0">
-              <a:spAutoFit/>
-            </a:bodyPr>
-            <a:lstStyle/>
-            <a:p>
-              <a:pPr algn="l" marL="0" indent="0" lvl="0">
-                <a:lnSpc>
-                  <a:spcPts val="2879"/>
-                </a:lnSpc>
-                <a:spcBef>
-                  <a:spcPct val="0"/>
-                </a:spcBef>
-              </a:pPr>
-              <a:r>
-                <a:rPr lang="en-US" b="true" sz="2400" strike="noStrike" u="none">
-                  <a:solidFill>
-                    <a:srgbClr val="9CA3AF"/>
-                  </a:solidFill>
-                  <a:latin typeface="Clear Sans Bold"/>
-                  <a:ea typeface="Clear Sans Bold"/>
-                  <a:cs typeface="Clear Sans Bold"/>
-                  <a:sym typeface="Clear Sans Bold"/>
-                </a:rPr>
-                <a:t>CONFIGURATION ET TESTS DE CONNECTIVITÉ</a:t>
-              </a:r>
-            </a:p>
-          </p:txBody>
-        </p:sp>
-        <p:sp>
-          <p:nvSpPr>
-            <p:cNvPr name="TextBox 7" id="7"/>
-            <p:cNvSpPr txBox="true"/>
-            <p:nvPr/>
-          </p:nvSpPr>
-          <p:spPr>
-            <a:xfrm rot="0">
-              <a:off x="0" y="1141095"/>
-              <a:ext cx="9182100" cy="3877945"/>
-            </a:xfrm>
-            <a:prstGeom prst="rect">
-              <a:avLst/>
-            </a:prstGeom>
-          </p:spPr>
-          <p:txBody>
-            <a:bodyPr anchor="t" rtlCol="false" tIns="0" lIns="0" bIns="0" rIns="0">
-              <a:spAutoFit/>
-            </a:bodyPr>
-            <a:lstStyle/>
-            <a:p>
-              <a:pPr algn="l" marL="0" indent="0" lvl="0">
-                <a:lnSpc>
-                  <a:spcPts val="3359"/>
-                </a:lnSpc>
-                <a:spcBef>
-                  <a:spcPct val="0"/>
-                </a:spcBef>
-              </a:pPr>
-              <a:r>
-                <a:rPr lang="en-US" sz="2399" strike="noStrike" u="none">
-                  <a:solidFill>
-                    <a:srgbClr val="F9FAFB"/>
-                  </a:solidFill>
-                  <a:latin typeface="Clear Sans"/>
-                  <a:ea typeface="Clear Sans"/>
-                  <a:cs typeface="Clear Sans"/>
-                  <a:sym typeface="Clear Sans"/>
-                </a:rPr>
-                <a:t>Automatisation IoT : fenêtre s'ouvre si température &gt; 28°C. Alarme se déclenche si détecteur de mouvement actif la nuit. Patient appuie sur smartphone → sirène activée depuis la salle de contrôle. Test ping inter-sites → succès (4/4). Webcam opérationnelle depuis la salle de contrôle.</a:t>
-              </a:r>
-            </a:p>
-          </p:txBody>
-        </p:sp>
-      </p:grpSp>
-    </p:spTree>
-  </p:cSld>
-  <p:clrMapOvr>
-    <a:masterClrMapping/>
-  </p:clrMapOvr>
-</p:sld>
-</file>
-
-<file path=ppt/slides/slide6.xml><?xml version="1.0" encoding="utf-8"?>
-<p:sld xmlns:p="http://schemas.openxmlformats.org/presentationml/2006/main" xmlns:a="http://schemas.openxmlformats.org/drawingml/2006/main" xmlns:r="http://schemas.openxmlformats.org/officeDocument/2006/relationships">
-  <p:cSld>
-    <p:bg>
-      <p:bgPr>
-        <a:solidFill>
-          <a:srgbClr val="1F2937"/>
-        </a:solidFill>
-      </p:bgPr>
-    </p:bg>
-    <p:spTree>
-      <p:nvGrpSpPr>
-        <p:cNvPr id="1" name=""/>
-        <p:cNvGrpSpPr/>
-        <p:nvPr/>
-      </p:nvGrpSpPr>
-      <p:grpSpPr>
-        <a:xfrm>
-          <a:off x="0" y="0"/>
-          <a:ext cx="0" cy="0"/>
-          <a:chOff x="0" y="0"/>
-          <a:chExt cx="0" cy="0"/>
-        </a:xfrm>
-      </p:grpSpPr>
-      <p:grpSp>
-        <p:nvGrpSpPr>
-          <p:cNvPr name="Group 2" id="2"/>
-          <p:cNvGrpSpPr/>
-          <p:nvPr/>
-        </p:nvGrpSpPr>
-        <p:grpSpPr>
-          <a:xfrm rot="0">
-            <a:off x="666750" y="1562100"/>
-            <a:ext cx="8324850" cy="5661660"/>
-            <a:chOff x="0" y="0"/>
-            <a:chExt cx="11099800" cy="7548880"/>
-          </a:xfrm>
-        </p:grpSpPr>
-        <p:sp>
-          <p:nvSpPr>
-            <p:cNvPr name="TextBox 3" id="3"/>
-            <p:cNvSpPr txBox="true"/>
-            <p:nvPr/>
-          </p:nvSpPr>
-          <p:spPr>
-            <a:xfrm rot="0">
-              <a:off x="0" y="0"/>
-              <a:ext cx="11099800" cy="2819400"/>
-            </a:xfrm>
-            <a:prstGeom prst="rect">
-              <a:avLst/>
-            </a:prstGeom>
-          </p:spPr>
-          <p:txBody>
-            <a:bodyPr anchor="t" rtlCol="false" tIns="0" lIns="0" bIns="0" rIns="0">
-              <a:spAutoFit/>
-            </a:bodyPr>
-            <a:lstStyle/>
-            <a:p>
-              <a:pPr algn="l" marL="0" indent="0" lvl="0">
-                <a:lnSpc>
-                  <a:spcPts val="8399"/>
-                </a:lnSpc>
-                <a:spcBef>
-                  <a:spcPct val="0"/>
-                </a:spcBef>
-              </a:pPr>
-              <a:r>
-                <a:rPr lang="en-US" sz="6999" spc="-139" strike="noStrike" u="none">
+                <a:rPr lang="en-US" sz="6999" u="none" strike="noStrike" spc="-139">
                   <a:solidFill>
                     <a:srgbClr val="3B82F6"/>
                   </a:solidFill>
@@ -4712,12 +4213,12 @@
         </p:sp>
         <p:sp>
           <p:nvSpPr>
-            <p:cNvPr name="TextBox 4" id="4"/>
-            <p:cNvSpPr txBox="true"/>
+            <p:cNvPr id="4" name="TextBox 4"/>
+            <p:cNvSpPr txBox="1"/>
             <p:nvPr/>
           </p:nvSpPr>
           <p:spPr>
-            <a:xfrm rot="0">
+            <a:xfrm>
               <a:off x="0" y="3581364"/>
               <a:ext cx="11099800" cy="482600"/>
             </a:xfrm>
@@ -4726,12 +4227,12 @@
             </a:prstGeom>
           </p:spPr>
           <p:txBody>
-            <a:bodyPr anchor="t" rtlCol="false" tIns="0" lIns="0" bIns="0" rIns="0">
+            <a:bodyPr lIns="0" tIns="0" rIns="0" bIns="0" rtlCol="0" anchor="t">
               <a:spAutoFit/>
             </a:bodyPr>
             <a:lstStyle/>
             <a:p>
-              <a:pPr algn="l" marL="0" indent="0" lvl="0">
+              <a:pPr marL="0" lvl="0" indent="0" algn="l">
                 <a:lnSpc>
                   <a:spcPts val="2879"/>
                 </a:lnSpc>
@@ -4740,7 +4241,7 @@
                 </a:spcBef>
               </a:pPr>
               <a:r>
-                <a:rPr lang="en-US" b="true" sz="2400" strike="noStrike" u="none">
+                <a:rPr lang="en-US" sz="2400" b="1" u="none" strike="noStrike">
                   <a:solidFill>
                     <a:srgbClr val="9CA3AF"/>
                   </a:solidFill>
@@ -4756,12 +4257,12 @@
         </p:sp>
         <p:sp>
           <p:nvSpPr>
-            <p:cNvPr name="TextBox 5" id="5"/>
-            <p:cNvSpPr txBox="true"/>
+            <p:cNvPr id="5" name="TextBox 5"/>
+            <p:cNvSpPr txBox="1"/>
             <p:nvPr/>
           </p:nvSpPr>
           <p:spPr>
-            <a:xfrm rot="0">
+            <a:xfrm>
               <a:off x="0" y="4600575"/>
               <a:ext cx="11099800" cy="2948305"/>
             </a:xfrm>
@@ -4770,12 +4271,12 @@
             </a:prstGeom>
           </p:spPr>
           <p:txBody>
-            <a:bodyPr anchor="t" rtlCol="false" tIns="0" lIns="0" bIns="0" rIns="0">
+            <a:bodyPr lIns="0" tIns="0" rIns="0" bIns="0" rtlCol="0" anchor="t">
               <a:spAutoFit/>
             </a:bodyPr>
             <a:lstStyle/>
             <a:p>
-              <a:pPr algn="l" marL="453390" indent="-226695" lvl="1">
+              <a:pPr marL="453390" lvl="1" indent="-226695" algn="l">
                 <a:lnSpc>
                   <a:spcPts val="2940"/>
                 </a:lnSpc>
@@ -4786,7 +4287,7 @@
                 <a:buChar char="•"/>
               </a:pPr>
               <a:r>
-                <a:rPr lang="en-US" sz="2100" strike="noStrike" u="none">
+                <a:rPr lang="en-US" sz="2100" u="none" strike="noStrike">
                   <a:solidFill>
                     <a:srgbClr val="F9FAFB"/>
                   </a:solidFill>
@@ -4803,12 +4304,12 @@
       </p:grpSp>
       <p:sp>
         <p:nvSpPr>
-          <p:cNvPr name="Freeform 6" id="6"/>
+          <p:cNvPr id="6" name="Freeform 6"/>
           <p:cNvSpPr/>
           <p:nvPr/>
         </p:nvSpPr>
         <p:spPr>
-          <a:xfrm flipH="false" flipV="false" rot="0">
+          <a:xfrm>
             <a:off x="15150568" y="7200900"/>
             <a:ext cx="6274865" cy="4114800"/>
           </a:xfrm>
@@ -4817,9 +4318,9 @@
             <a:gdLst/>
             <a:ahLst/>
             <a:cxnLst/>
-            <a:rect r="r" b="b" t="t" l="l"/>
+            <a:rect l="l" t="t" r="r" b="b"/>
             <a:pathLst>
-              <a:path h="4114800" w="6274865">
+              <a:path w="6274865" h="4114800">
                 <a:moveTo>
                   <a:pt x="0" y="0"/>
                 </a:moveTo>
@@ -4840,15 +4341,15 @@
             </a:pathLst>
           </a:custGeom>
           <a:blipFill>
-            <a:blip r:embed="rId2">
+            <a:blip>
               <a:extLst>
                 <a:ext uri="{96DAC541-7B7A-43D3-8B79-37D633B846F1}">
-                  <asvg:svgBlip xmlns:asvg="http://schemas.microsoft.com/office/drawing/2016/SVG/main" r:embed="rId3"/>
+                  <asvg:svgBlip xmlns:asvg="http://schemas.microsoft.com/office/drawing/2016/SVG/main" r:embed="rId2"/>
                 </a:ext>
               </a:extLst>
             </a:blip>
             <a:stretch>
-              <a:fillRect l="0" t="0" r="0" b="0"/>
+              <a:fillRect/>
             </a:stretch>
           </a:blipFill>
           <a:ln cap="sq">
@@ -4857,493 +4358,14 @@
             <a:miter/>
           </a:ln>
         </p:spPr>
-      </p:sp>
-    </p:spTree>
-  </p:cSld>
-  <p:clrMapOvr>
-    <a:masterClrMapping/>
-  </p:clrMapOvr>
-</p:sld>
-</file>
-
-<file path=ppt/slides/slide7.xml><?xml version="1.0" encoding="utf-8"?>
-<p:sld xmlns:p="http://schemas.openxmlformats.org/presentationml/2006/main" xmlns:a="http://schemas.openxmlformats.org/drawingml/2006/main" xmlns:r="http://schemas.openxmlformats.org/officeDocument/2006/relationships">
-  <p:cSld>
-    <p:bg>
-      <p:bgPr>
-        <a:solidFill>
-          <a:srgbClr val="1F2937"/>
-        </a:solidFill>
-      </p:bgPr>
-    </p:bg>
-    <p:spTree>
-      <p:nvGrpSpPr>
-        <p:cNvPr id="1" name=""/>
-        <p:cNvGrpSpPr/>
-        <p:nvPr/>
-      </p:nvGrpSpPr>
-      <p:grpSpPr>
-        <a:xfrm>
-          <a:off x="0" y="0"/>
-          <a:ext cx="0" cy="0"/>
-          <a:chOff x="0" y="0"/>
-          <a:chExt cx="0" cy="0"/>
-        </a:xfrm>
-      </p:grpSpPr>
-      <p:sp>
-        <p:nvSpPr>
-          <p:cNvPr name="Freeform 2" id="2"/>
-          <p:cNvSpPr/>
-          <p:nvPr/>
-        </p:nvSpPr>
-        <p:spPr>
-          <a:xfrm flipH="false" flipV="false" rot="-2926989">
-            <a:off x="-12431368" y="-8975965"/>
-            <a:ext cx="27274407" cy="25058977"/>
-          </a:xfrm>
-          <a:custGeom>
-            <a:avLst/>
-            <a:gdLst/>
-            <a:ahLst/>
-            <a:cxnLst/>
-            <a:rect r="r" b="b" t="t" l="l"/>
-            <a:pathLst>
-              <a:path h="25058977" w="27274407">
-                <a:moveTo>
-                  <a:pt x="0" y="0"/>
-                </a:moveTo>
-                <a:lnTo>
-                  <a:pt x="27274407" y="0"/>
-                </a:lnTo>
-                <a:lnTo>
-                  <a:pt x="27274407" y="25058977"/>
-                </a:lnTo>
-                <a:lnTo>
-                  <a:pt x="0" y="25058977"/>
-                </a:lnTo>
-                <a:lnTo>
-                  <a:pt x="0" y="0"/>
-                </a:lnTo>
-                <a:close/>
-              </a:path>
-            </a:pathLst>
-          </a:custGeom>
-          <a:blipFill>
-            <a:blip r:embed="rId2">
-              <a:extLst>
-                <a:ext uri="{96DAC541-7B7A-43D3-8B79-37D633B846F1}">
-                  <asvg:svgBlip xmlns:asvg="http://schemas.microsoft.com/office/drawing/2016/SVG/main" r:embed="rId3"/>
-                </a:ext>
-              </a:extLst>
-            </a:blip>
-            <a:stretch>
-              <a:fillRect l="0" t="0" r="0" b="0"/>
-            </a:stretch>
-          </a:blipFill>
-          <a:ln cap="sq">
-            <a:noFill/>
-            <a:prstDash val="solid"/>
-            <a:miter/>
-          </a:ln>
-        </p:spPr>
-      </p:sp>
-      <p:sp>
-        <p:nvSpPr>
-          <p:cNvPr name="Freeform 3" id="3"/>
-          <p:cNvSpPr/>
-          <p:nvPr/>
-        </p:nvSpPr>
-        <p:spPr>
-          <a:xfrm flipH="false" flipV="false" rot="5111384">
-            <a:off x="13680135" y="1098024"/>
-            <a:ext cx="12122938" cy="11672351"/>
-          </a:xfrm>
-          <a:custGeom>
-            <a:avLst/>
-            <a:gdLst/>
-            <a:ahLst/>
-            <a:cxnLst/>
-            <a:rect r="r" b="b" t="t" l="l"/>
-            <a:pathLst>
-              <a:path h="11672351" w="12122938">
-                <a:moveTo>
-                  <a:pt x="0" y="0"/>
-                </a:moveTo>
-                <a:lnTo>
-                  <a:pt x="12122939" y="0"/>
-                </a:lnTo>
-                <a:lnTo>
-                  <a:pt x="12122939" y="11672352"/>
-                </a:lnTo>
-                <a:lnTo>
-                  <a:pt x="0" y="11672352"/>
-                </a:lnTo>
-                <a:lnTo>
-                  <a:pt x="0" y="0"/>
-                </a:lnTo>
-                <a:close/>
-              </a:path>
-            </a:pathLst>
-          </a:custGeom>
-          <a:blipFill>
-            <a:blip r:embed="rId4">
-              <a:extLst>
-                <a:ext uri="{96DAC541-7B7A-43D3-8B79-37D633B846F1}">
-                  <asvg:svgBlip xmlns:asvg="http://schemas.microsoft.com/office/drawing/2016/SVG/main" r:embed="rId5"/>
-                </a:ext>
-              </a:extLst>
-            </a:blip>
-            <a:stretch>
-              <a:fillRect l="0" t="0" r="0" b="0"/>
-            </a:stretch>
-          </a:blipFill>
-        </p:spPr>
-      </p:sp>
-      <p:sp>
-        <p:nvSpPr>
-          <p:cNvPr name="TextBox 4" id="4"/>
-          <p:cNvSpPr txBox="true"/>
-          <p:nvPr/>
-        </p:nvSpPr>
-        <p:spPr>
-          <a:xfrm rot="0">
-            <a:off x="666750" y="757782"/>
-            <a:ext cx="11201400" cy="4229100"/>
-          </a:xfrm>
-          <a:prstGeom prst="rect">
-            <a:avLst/>
-          </a:prstGeom>
-        </p:spPr>
-        <p:txBody>
-          <a:bodyPr anchor="t" rtlCol="false" tIns="0" lIns="0" bIns="0" rIns="0">
-            <a:spAutoFit/>
-          </a:bodyPr>
-          <a:lstStyle/>
-          <a:p>
-            <a:pPr algn="l" marL="0" indent="0" lvl="0">
-              <a:lnSpc>
-                <a:spcPts val="8399"/>
-              </a:lnSpc>
-              <a:spcBef>
-                <a:spcPct val="0"/>
-              </a:spcBef>
-            </a:pPr>
-            <a:r>
-              <a:rPr lang="en-US" sz="6999" spc="-139" strike="noStrike" u="none">
-                <a:solidFill>
-                  <a:srgbClr val="3B82F6"/>
-                </a:solidFill>
-                <a:latin typeface="Tenor Sans"/>
-                <a:ea typeface="Tenor Sans"/>
-                <a:cs typeface="Tenor Sans"/>
-                <a:sym typeface="Tenor Sans"/>
-              </a:rPr>
-              <a:t>Faculté des Sciences de Monastir</a:t>
-            </a:r>
-          </a:p>
-          <a:p>
-            <a:pPr algn="l" marL="0" indent="0" lvl="0">
-              <a:lnSpc>
-                <a:spcPts val="8399"/>
-              </a:lnSpc>
-              <a:spcBef>
-                <a:spcPct val="0"/>
-              </a:spcBef>
-            </a:pPr>
-            <a:r>
-              <a:rPr lang="en-US" sz="6999" spc="-139" strike="noStrike" u="none">
-                <a:solidFill>
-                  <a:srgbClr val="3B82F6"/>
-                </a:solidFill>
-                <a:latin typeface="Tenor Sans"/>
-                <a:ea typeface="Tenor Sans"/>
-                <a:cs typeface="Tenor Sans"/>
-                <a:sym typeface="Tenor Sans"/>
-              </a:rPr>
-              <a:t>Mini Projet – Fondements Des Réseaux</a:t>
-            </a:r>
-          </a:p>
-        </p:txBody>
-      </p:sp>
-      <p:grpSp>
-        <p:nvGrpSpPr>
-          <p:cNvPr name="Group 5" id="5"/>
-          <p:cNvGrpSpPr/>
-          <p:nvPr/>
-        </p:nvGrpSpPr>
-        <p:grpSpPr>
-          <a:xfrm rot="0">
-            <a:off x="666750" y="5143500"/>
-            <a:ext cx="8324850" cy="3465218"/>
-            <a:chOff x="0" y="0"/>
-            <a:chExt cx="11099800" cy="4620291"/>
-          </a:xfrm>
-        </p:grpSpPr>
-        <p:sp>
-          <p:nvSpPr>
-            <p:cNvPr name="TextBox 6" id="6"/>
-            <p:cNvSpPr txBox="true"/>
-            <p:nvPr/>
-          </p:nvSpPr>
-          <p:spPr>
-            <a:xfrm rot="0">
-              <a:off x="0" y="-76200"/>
-              <a:ext cx="11099800" cy="563880"/>
-            </a:xfrm>
-            <a:prstGeom prst="rect">
-              <a:avLst/>
-            </a:prstGeom>
-          </p:spPr>
-          <p:txBody>
-            <a:bodyPr anchor="t" rtlCol="false" tIns="0" lIns="0" bIns="0" rIns="0">
-              <a:spAutoFit/>
-            </a:bodyPr>
-            <a:lstStyle/>
-            <a:p>
-              <a:pPr algn="l" marL="0" indent="0" lvl="0">
-                <a:lnSpc>
-                  <a:spcPts val="3600"/>
-                </a:lnSpc>
-                <a:spcBef>
-                  <a:spcPct val="0"/>
-                </a:spcBef>
-              </a:pPr>
-              <a:r>
-                <a:rPr lang="en-US" b="true" sz="2400" strike="noStrike" u="none">
-                  <a:solidFill>
-                    <a:srgbClr val="9CA3AF"/>
-                  </a:solidFill>
-                  <a:latin typeface="Clear Sans Bold"/>
-                  <a:ea typeface="Clear Sans Bold"/>
-                  <a:cs typeface="Clear Sans Bold"/>
-                  <a:sym typeface="Clear Sans Bold"/>
-                </a:rPr>
-                <a:t>ÉTABLISSEMENT</a:t>
-              </a:r>
-            </a:p>
-          </p:txBody>
-        </p:sp>
-        <p:sp>
-          <p:nvSpPr>
-            <p:cNvPr name="TextBox 7" id="7"/>
-            <p:cNvSpPr txBox="true"/>
-            <p:nvPr/>
-          </p:nvSpPr>
-          <p:spPr>
-            <a:xfrm rot="0">
-              <a:off x="0" y="567135"/>
-              <a:ext cx="11099800" cy="471805"/>
-            </a:xfrm>
-            <a:prstGeom prst="rect">
-              <a:avLst/>
-            </a:prstGeom>
-          </p:spPr>
-          <p:txBody>
-            <a:bodyPr anchor="t" rtlCol="false" tIns="0" lIns="0" bIns="0" rIns="0">
-              <a:spAutoFit/>
-            </a:bodyPr>
-            <a:lstStyle/>
-            <a:p>
-              <a:pPr algn="l" marL="0" indent="0" lvl="0">
-                <a:lnSpc>
-                  <a:spcPts val="2940"/>
-                </a:lnSpc>
-                <a:spcBef>
-                  <a:spcPct val="0"/>
-                </a:spcBef>
-              </a:pPr>
-              <a:r>
-                <a:rPr lang="en-US" sz="2100" strike="noStrike" u="none">
-                  <a:solidFill>
-                    <a:srgbClr val="F9FAFB"/>
-                  </a:solidFill>
-                  <a:latin typeface="Clear Sans"/>
-                  <a:ea typeface="Clear Sans"/>
-                  <a:cs typeface="Clear Sans"/>
-                  <a:sym typeface="Clear Sans"/>
-                </a:rPr>
-                <a:t>Faculté des Sciences de Monastir – FSM</a:t>
-              </a:r>
-            </a:p>
-          </p:txBody>
-        </p:sp>
-        <p:sp>
-          <p:nvSpPr>
-            <p:cNvPr name="TextBox 8" id="8"/>
-            <p:cNvSpPr txBox="true"/>
-            <p:nvPr/>
-          </p:nvSpPr>
-          <p:spPr>
-            <a:xfrm rot="0">
-              <a:off x="0" y="1714475"/>
-              <a:ext cx="11099800" cy="563880"/>
-            </a:xfrm>
-            <a:prstGeom prst="rect">
-              <a:avLst/>
-            </a:prstGeom>
-          </p:spPr>
-          <p:txBody>
-            <a:bodyPr anchor="t" rtlCol="false" tIns="0" lIns="0" bIns="0" rIns="0">
-              <a:spAutoFit/>
-            </a:bodyPr>
-            <a:lstStyle/>
-            <a:p>
-              <a:pPr algn="l" marL="0" indent="0" lvl="0">
-                <a:lnSpc>
-                  <a:spcPts val="3600"/>
-                </a:lnSpc>
-                <a:spcBef>
-                  <a:spcPct val="0"/>
-                </a:spcBef>
-              </a:pPr>
-              <a:r>
-                <a:rPr lang="en-US" b="true" sz="2400" strike="noStrike" u="none">
-                  <a:solidFill>
-                    <a:srgbClr val="9CA3AF"/>
-                  </a:solidFill>
-                  <a:latin typeface="Clear Sans Bold"/>
-                  <a:ea typeface="Clear Sans Bold"/>
-                  <a:cs typeface="Clear Sans Bold"/>
-                  <a:sym typeface="Clear Sans Bold"/>
-                </a:rPr>
-                <a:t>MODULE</a:t>
-              </a:r>
-            </a:p>
-          </p:txBody>
-        </p:sp>
-        <p:sp>
-          <p:nvSpPr>
-            <p:cNvPr name="TextBox 9" id="9"/>
-            <p:cNvSpPr txBox="true"/>
-            <p:nvPr/>
-          </p:nvSpPr>
-          <p:spPr>
-            <a:xfrm rot="0">
-              <a:off x="0" y="2357810"/>
-              <a:ext cx="11099800" cy="471805"/>
-            </a:xfrm>
-            <a:prstGeom prst="rect">
-              <a:avLst/>
-            </a:prstGeom>
-          </p:spPr>
-          <p:txBody>
-            <a:bodyPr anchor="t" rtlCol="false" tIns="0" lIns="0" bIns="0" rIns="0">
-              <a:spAutoFit/>
-            </a:bodyPr>
-            <a:lstStyle/>
-            <a:p>
-              <a:pPr algn="l" marL="0" indent="0" lvl="0">
-                <a:lnSpc>
-                  <a:spcPts val="2940"/>
-                </a:lnSpc>
-                <a:spcBef>
-                  <a:spcPct val="0"/>
-                </a:spcBef>
-              </a:pPr>
-              <a:r>
-                <a:rPr lang="en-US" sz="2100" strike="noStrike" u="none">
-                  <a:solidFill>
-                    <a:srgbClr val="F9FAFB"/>
-                  </a:solidFill>
-                  <a:latin typeface="Clear Sans"/>
-                  <a:ea typeface="Clear Sans"/>
-                  <a:cs typeface="Clear Sans"/>
-                  <a:sym typeface="Clear Sans"/>
-                </a:rPr>
-                <a:t>Fondements Des Réseaux</a:t>
-              </a:r>
-            </a:p>
-          </p:txBody>
-        </p:sp>
-        <p:sp>
-          <p:nvSpPr>
-            <p:cNvPr name="TextBox 10" id="10"/>
-            <p:cNvSpPr txBox="true"/>
-            <p:nvPr/>
-          </p:nvSpPr>
-          <p:spPr>
-            <a:xfrm rot="0">
-              <a:off x="0" y="3505150"/>
-              <a:ext cx="11099800" cy="563880"/>
-            </a:xfrm>
-            <a:prstGeom prst="rect">
-              <a:avLst/>
-            </a:prstGeom>
-          </p:spPr>
-          <p:txBody>
-            <a:bodyPr anchor="t" rtlCol="false" tIns="0" lIns="0" bIns="0" rIns="0">
-              <a:spAutoFit/>
-            </a:bodyPr>
-            <a:lstStyle/>
-            <a:p>
-              <a:pPr algn="l" marL="0" indent="0" lvl="0">
-                <a:lnSpc>
-                  <a:spcPts val="3600"/>
-                </a:lnSpc>
-                <a:spcBef>
-                  <a:spcPct val="0"/>
-                </a:spcBef>
-              </a:pPr>
-              <a:r>
-                <a:rPr lang="en-US" b="true" sz="2400" strike="noStrike" u="none">
-                  <a:solidFill>
-                    <a:srgbClr val="9CA3AF"/>
-                  </a:solidFill>
-                  <a:latin typeface="Clear Sans Bold"/>
-                  <a:ea typeface="Clear Sans Bold"/>
-                  <a:cs typeface="Clear Sans Bold"/>
-                  <a:sym typeface="Clear Sans Bold"/>
-                </a:rPr>
-                <a:t>ANNÉE UNIVERSITAIRE</a:t>
-              </a:r>
-            </a:p>
-          </p:txBody>
-        </p:sp>
-        <p:sp>
-          <p:nvSpPr>
-            <p:cNvPr name="TextBox 11" id="11"/>
-            <p:cNvSpPr txBox="true"/>
-            <p:nvPr/>
-          </p:nvSpPr>
-          <p:spPr>
-            <a:xfrm rot="0">
-              <a:off x="0" y="4148486"/>
-              <a:ext cx="11099800" cy="471805"/>
-            </a:xfrm>
-            <a:prstGeom prst="rect">
-              <a:avLst/>
-            </a:prstGeom>
-          </p:spPr>
-          <p:txBody>
-            <a:bodyPr anchor="t" rtlCol="false" tIns="0" lIns="0" bIns="0" rIns="0">
-              <a:spAutoFit/>
-            </a:bodyPr>
-            <a:lstStyle/>
-            <a:p>
-              <a:pPr algn="l" marL="0" indent="0" lvl="0">
-                <a:lnSpc>
-                  <a:spcPts val="2940"/>
-                </a:lnSpc>
-                <a:spcBef>
-                  <a:spcPct val="0"/>
-                </a:spcBef>
-              </a:pPr>
-              <a:r>
-                <a:rPr lang="en-US" sz="2100" strike="noStrike" u="none">
-                  <a:solidFill>
-                    <a:srgbClr val="F9FAFB"/>
-                  </a:solidFill>
-                  <a:latin typeface="Clear Sans"/>
-                  <a:ea typeface="Clear Sans"/>
-                  <a:cs typeface="Clear Sans"/>
-                  <a:sym typeface="Clear Sans"/>
-                </a:rPr>
-                <a:t>2025 / 2026</a:t>
-              </a:r>
-            </a:p>
-          </p:txBody>
-        </p:sp>
-      </p:grpSp>
+        <p:txBody>
+          <a:bodyPr/>
+          <a:lstStyle/>
+          <a:p>
+            <a:endParaRPr lang="en-GB"/>
+          </a:p>
+        </p:txBody>
+      </p:sp>
     </p:spTree>
   </p:cSld>
   <p:clrMapOvr>
